--- a/SIH2026_26037_Idea.pptx
+++ b/SIH2026_26037_Idea.pptx
@@ -17214,19 +17214,39 @@
           <a:p>
             <a:pPr algn="l">
               <a:spcAft>
+                <a:spcPts val="100"/>
+              </a:spcAft>
+            </a:pPr>
+            <a:r>
+              <a:rPr sz="1200" b="1" i="0" u="sng">
+                <a:solidFill>
+                  <a:srgbClr val="1565C0"/>
+                </a:solidFill>
+                <a:latin typeface="Calibri"/>
+                <a:hlinkClick r:id="rId8"/>
+                <a:ea typeface="Calibri"/>
+                <a:cs typeface="Calibri"/>
+              </a:rPr>
+              <a:t>1) Source Code Repository</a:t>
+            </a:r>
+          </a:p>
+          <a:p>
+            <a:pPr algn="l">
+              <a:spcAft>
                 <a:spcPts val="500"/>
               </a:spcAft>
             </a:pPr>
             <a:r>
-              <a:rPr sz="1200" b="1" i="0" u="sng">
-                <a:solidFill>
-                  <a:srgbClr val="1565C0"/>
+              <a:rPr sz="800" b="0" i="0">
+                <a:solidFill>
+                  <a:srgbClr val="555555"/>
                 </a:solidFill>
                 <a:latin typeface="Calibri"/>
+                <a:hlinkClick r:id="rId8"/>
                 <a:ea typeface="Calibri"/>
                 <a:cs typeface="Calibri"/>
               </a:rPr>
-              <a:t>1) Source Code Repository</a:t>
+              <a:t>github.com/FX-at-Dev/Adaptive-Lane-Free-Path-Planning---Collision-Avoidance-for-Indian-Roads</a:t>
             </a:r>
           </a:p>
           <a:p>

--- a/SIH2026_26037_Idea.pptx
+++ b/SIH2026_26037_Idea.pptx
@@ -5,7 +5,7 @@
     <p:sldMasterId id="2147483648" r:id="rId1"/>
   </p:sldMasterIdLst>
   <p:notesMasterIdLst>
-    <p:notesMasterId r:id="rId9"/>
+    <p:notesMasterId r:id="rId8"/>
   </p:notesMasterIdLst>
   <p:sldIdLst>
     <p:sldId id="291" r:id="rId2"/>
@@ -261,7 +261,7 @@
             <a:fld id="{C4D5ADD5-2BBC-4A94-8F86-D9013941F742}" type="datetimeFigureOut">
               <a:rPr lang="en-US"/>
               <a:pPr/>
-              <a:t>6/2/2026</a:t>
+              <a:t>9/30/2026</a:t>
             </a:fld>
             <a:endParaRPr lang="en-US"/>
           </a:p>
@@ -1534,7 +1534,7 @@
           <a:p>
             <a:fld id="{E60792E3-D524-454C-8AFD-A91972900BCB}" type="datetime1">
               <a:rPr lang="en-US" smtClean="0"/>
-              <a:t>6/2/2026</a:t>
+              <a:t>9/30/2026</a:t>
             </a:fld>
             <a:endParaRPr lang="en-US"/>
           </a:p>
@@ -1716,7 +1716,7 @@
           <a:p>
             <a:fld id="{053C3A68-6922-42D3-8905-ECC2D82A3469}" type="datetime1">
               <a:rPr lang="en-US" smtClean="0"/>
-              <a:t>6/2/2026</a:t>
+              <a:t>9/30/2026</a:t>
             </a:fld>
             <a:endParaRPr lang="en-US"/>
           </a:p>
@@ -1908,7 +1908,7 @@
           <a:p>
             <a:fld id="{CB69E9F4-7604-4950-A8B2-8ACDEDB1506E}" type="datetime1">
               <a:rPr lang="en-US" smtClean="0"/>
-              <a:t>6/2/2026</a:t>
+              <a:t>9/30/2026</a:t>
             </a:fld>
             <a:endParaRPr lang="en-US"/>
           </a:p>
@@ -2090,7 +2090,7 @@
           <a:p>
             <a:fld id="{708B7524-32A2-4C20-A58C-BC3BAA1042FC}" type="datetime1">
               <a:rPr lang="en-US" smtClean="0"/>
-              <a:t>6/2/2026</a:t>
+              <a:t>9/30/2026</a:t>
             </a:fld>
             <a:endParaRPr lang="en-US"/>
           </a:p>
@@ -2349,7 +2349,7 @@
           <a:p>
             <a:fld id="{1E994447-D6B2-43BB-A877-57F1A267B999}" type="datetime1">
               <a:rPr lang="en-US" smtClean="0"/>
-              <a:t>6/2/2026</a:t>
+              <a:t>9/30/2026</a:t>
             </a:fld>
             <a:endParaRPr lang="en-US"/>
           </a:p>
@@ -2648,7 +2648,7 @@
           <a:p>
             <a:fld id="{68920E16-BD35-483C-AA6B-346FC7E46DEA}" type="datetime1">
               <a:rPr lang="en-US" smtClean="0"/>
-              <a:t>6/2/2026</a:t>
+              <a:t>9/30/2026</a:t>
             </a:fld>
             <a:endParaRPr lang="en-US"/>
           </a:p>
@@ -3081,7 +3081,7 @@
           <a:p>
             <a:fld id="{2FEAC6F8-5103-4FC0-A69E-5C6AE6469DA8}" type="datetime1">
               <a:rPr lang="en-US" smtClean="0"/>
-              <a:t>6/2/2026</a:t>
+              <a:t>9/30/2026</a:t>
             </a:fld>
             <a:endParaRPr lang="en-US"/>
           </a:p>
@@ -3212,7 +3212,7 @@
           <a:p>
             <a:fld id="{C60C6921-0627-4C8F-83D5-0CF936D2FFDD}" type="datetime1">
               <a:rPr lang="en-US" smtClean="0"/>
-              <a:t>6/2/2026</a:t>
+              <a:t>9/30/2026</a:t>
             </a:fld>
             <a:endParaRPr lang="en-US"/>
           </a:p>
@@ -3321,7 +3321,7 @@
           <a:p>
             <a:fld id="{2FF08AD7-8103-40F8-983C-E2BA6BB9CBE0}" type="datetime1">
               <a:rPr lang="en-US" smtClean="0"/>
-              <a:t>6/2/2026</a:t>
+              <a:t>9/30/2026</a:t>
             </a:fld>
             <a:endParaRPr lang="en-US"/>
           </a:p>
@@ -3610,7 +3610,7 @@
           <a:p>
             <a:fld id="{DF8C06B4-9380-4A4D-AF49-A3596E17DAF5}" type="datetime1">
               <a:rPr lang="en-US" smtClean="0"/>
-              <a:t>6/2/2026</a:t>
+              <a:t>9/30/2026</a:t>
             </a:fld>
             <a:endParaRPr lang="en-US"/>
           </a:p>
@@ -3879,7 +3879,7 @@
           <a:p>
             <a:fld id="{EF7FDEF1-C582-4E22-9E77-D68326471F28}" type="datetime1">
               <a:rPr lang="en-US" smtClean="0"/>
-              <a:t>6/2/2026</a:t>
+              <a:t>9/30/2026</a:t>
             </a:fld>
             <a:endParaRPr lang="en-US"/>
           </a:p>
@@ -4122,7 +4122,7 @@
           <a:p>
             <a:fld id="{780A9602-A9A9-453F-AEF1-37B5837E02CD}" type="datetime1">
               <a:rPr lang="en-US" smtClean="0"/>
-              <a:t>6/2/2026</a:t>
+              <a:t>9/30/2026</a:t>
             </a:fld>
             <a:endParaRPr lang="en-US"/>
           </a:p>
@@ -4673,7 +4673,7 @@
                 <a16:creationId xmlns:a16="http://schemas.microsoft.com/office/drawing/2014/main" id="{3E443FD7-A66B-4AA0-872D-B088B9BC5F17}"/>
               </a:ext>
               <a:ext uri="{C183D7F6-B498-43B3-948B-1728B52AA6E4}">
-                <adec:decorative xmlns:adec="http://schemas.microsoft.com/office/drawing/2017/decorative" xmlns="" val="1"/>
+                <adec:decorative xmlns:adec="http://schemas.microsoft.com/office/drawing/2017/decorative" val="1"/>
               </a:ext>
             </a:extLst>
           </p:cNvPr>
@@ -4733,7 +4733,7 @@
                 <a16:creationId xmlns:a16="http://schemas.microsoft.com/office/drawing/2014/main" id="{C04BE0EF-3561-49B4-9A29-F283168A91C7}"/>
               </a:ext>
               <a:ext uri="{C183D7F6-B498-43B3-948B-1728B52AA6E4}">
-                <adec:decorative xmlns:adec="http://schemas.microsoft.com/office/drawing/2017/decorative" xmlns="" val="1"/>
+                <adec:decorative xmlns:adec="http://schemas.microsoft.com/office/drawing/2017/decorative" val="1"/>
               </a:ext>
             </a:extLst>
           </p:cNvPr>
@@ -5604,16 +5604,7 @@
                 </a:solidFill>
                 <a:latin typeface="Garamond" panose="02020404030301010803" pitchFamily="18" charset="0"/>
               </a:rPr>
-              <a:t>SMART INDIA HACKATHON </a:t>
-            </a:r>
-            <a:r>
-              <a:rPr lang="en-US" sz="4000" b="1" dirty="0" smtClean="0">
-                <a:solidFill>
-                  <a:schemeClr val="tx2"/>
-                </a:solidFill>
-                <a:latin typeface="Garamond" panose="02020404030301010803" pitchFamily="18" charset="0"/>
-              </a:rPr>
-              <a:t>2026</a:t>
+              <a:t>SMART INDIA HACKATHON 2026</a:t>
             </a:r>
             <a:endParaRPr lang="en-IN" sz="4000" b="1" dirty="0">
               <a:solidFill>
@@ -5671,12 +5662,12 @@
           <a:noFill/>
         </p:spPr>
         <p:txBody>
-          <a:bodyPr wrap="square" lIns="36576" rIns="36576" tIns="36576" bIns="36576" anchor="t">
+          <a:bodyPr wrap="square" lIns="36576" tIns="36576" rIns="36576" bIns="36576" anchor="t">
             <a:spAutoFit/>
           </a:bodyPr>
           <a:lstStyle/>
           <a:p>
-            <a:pPr algn="l" marL="146304" indent="-146304">
+            <a:pPr marL="146304" indent="-146304" algn="l">
               <a:spcAft>
                 <a:spcPts val="1200"/>
               </a:spcAft>
@@ -5707,7 +5698,7 @@
             </a:r>
           </a:p>
           <a:p>
-            <a:pPr algn="l" marL="146304" indent="-146304">
+            <a:pPr marL="146304" indent="-146304" algn="l">
               <a:spcAft>
                 <a:spcPts val="200"/>
               </a:spcAft>
@@ -5727,7 +5718,7 @@
             </a:r>
           </a:p>
           <a:p>
-            <a:pPr algn="l" marL="146304">
+            <a:pPr marL="146304" algn="l">
               <a:spcAft>
                 <a:spcPts val="1200"/>
               </a:spcAft>
@@ -5745,7 +5736,7 @@
             </a:r>
           </a:p>
           <a:p>
-            <a:pPr algn="l" marL="146304" indent="-146304">
+            <a:pPr marL="146304" indent="-146304" algn="l">
               <a:spcAft>
                 <a:spcPts val="1200"/>
               </a:spcAft>
@@ -5776,7 +5767,7 @@
             </a:r>
           </a:p>
           <a:p>
-            <a:pPr algn="l" marL="146304" indent="-146304">
+            <a:pPr marL="146304" indent="-146304" algn="l">
               <a:spcAft>
                 <a:spcPts val="1200"/>
               </a:spcAft>
@@ -5807,7 +5798,7 @@
             </a:r>
           </a:p>
           <a:p>
-            <a:pPr algn="l" marL="146304" indent="-146304">
+            <a:pPr marL="146304" indent="-146304" algn="l">
               <a:spcAft>
                 <a:spcPts val="1200"/>
               </a:spcAft>
@@ -5838,7 +5829,7 @@
             </a:r>
           </a:p>
           <a:p>
-            <a:pPr algn="l" marL="146304" indent="-146304">
+            <a:pPr marL="146304" indent="-146304" algn="l">
               <a:spcAft>
                 <a:spcPts val="0"/>
               </a:spcAft>
@@ -5897,64 +5888,6 @@
       </p:grpSpPr>
       <p:sp>
         <p:nvSpPr>
-          <p:cNvPr id="9" name="Rectangle 8"/>
-          <p:cNvSpPr>
-            <a:spLocks noChangeArrowheads="1"/>
-          </p:cNvSpPr>
-          <p:nvPr/>
-        </p:nvSpPr>
-        <p:spPr bwMode="auto">
-          <a:xfrm>
-            <a:off x="0" y="6354762"/>
-            <a:ext cx="12191999" cy="503238"/>
-          </a:xfrm>
-          <a:prstGeom prst="rect">
-            <a:avLst/>
-          </a:prstGeom>
-          <a:solidFill>
-            <a:srgbClr val="0070C0"/>
-          </a:solidFill>
-          <a:ln w="9525">
-            <a:noFill/>
-            <a:miter lim="800000"/>
-            <a:headEnd/>
-            <a:tailEnd/>
-          </a:ln>
-          <a:effectLst>
-            <a:outerShdw dist="23000" dir="5400000" rotWithShape="0">
-              <a:srgbClr val="808080">
-                <a:alpha val="34999"/>
-              </a:srgbClr>
-            </a:outerShdw>
-          </a:effectLst>
-        </p:spPr>
-        <p:txBody>
-          <a:bodyPr anchor="ctr"/>
-          <a:lstStyle/>
-          <a:p>
-            <a:pPr algn="ctr" fontAlgn="auto">
-              <a:spcBef>
-                <a:spcPts val="0"/>
-              </a:spcBef>
-              <a:spcAft>
-                <a:spcPts val="0"/>
-              </a:spcAft>
-              <a:defRPr/>
-            </a:pPr>
-            <a:endParaRPr lang="en-US" dirty="0">
-              <a:solidFill>
-                <a:schemeClr val="accent2">
-                  <a:lumMod val="75000"/>
-                </a:schemeClr>
-              </a:solidFill>
-              <a:latin typeface="+mn-lt"/>
-              <a:ea typeface="+mn-ea"/>
-            </a:endParaRPr>
-          </a:p>
-        </p:txBody>
-      </p:sp>
-      <p:sp>
-        <p:nvSpPr>
           <p:cNvPr id="15361" name="Title 1"/>
           <p:cNvSpPr>
             <a:spLocks noGrp="1"/>
@@ -5973,7 +5906,7 @@
           <a:bodyPr anchor="ctr"/>
           <a:lstStyle/>
           <a:p>
-            <a:pPr eaLnBrk="1" hangingPunct="1" algn="ctr"/>
+            <a:pPr algn="ctr" eaLnBrk="1" hangingPunct="1"/>
             <a:r>
               <a:rPr sz="3600" b="1" i="0">
                 <a:solidFill>
@@ -6166,7 +6099,7 @@
           <a:noFill/>
         </p:spPr>
         <p:txBody>
-          <a:bodyPr wrap="square" lIns="0" rIns="0" tIns="0" bIns="0" anchor="ctr">
+          <a:bodyPr wrap="square" lIns="0" tIns="0" rIns="0" bIns="0" anchor="ctr">
             <a:spAutoFit/>
           </a:bodyPr>
           <a:lstStyle/>
@@ -6234,6 +6167,7 @@
           <a:lstStyle/>
           <a:p>
             <a:pPr algn="ctr"/>
+            <a:endParaRPr/>
           </a:p>
         </p:txBody>
       </p:sp>
@@ -6254,7 +6188,7 @@
           <a:noFill/>
         </p:spPr>
         <p:txBody>
-          <a:bodyPr wrap="square" lIns="36576" rIns="36576" tIns="36576" bIns="36576" anchor="ctr">
+          <a:bodyPr wrap="square" lIns="36576" tIns="36576" rIns="36576" bIns="36576" anchor="ctr">
             <a:spAutoFit/>
           </a:bodyPr>
           <a:lstStyle/>
@@ -6333,6 +6267,7 @@
           <a:lstStyle/>
           <a:p>
             <a:pPr algn="ctr"/>
+            <a:endParaRPr/>
           </a:p>
         </p:txBody>
       </p:sp>
@@ -6353,7 +6288,7 @@
           <a:noFill/>
         </p:spPr>
         <p:txBody>
-          <a:bodyPr wrap="square" lIns="36576" rIns="36576" tIns="36576" bIns="36576" anchor="ctr">
+          <a:bodyPr wrap="square" lIns="36576" tIns="36576" rIns="36576" bIns="36576" anchor="ctr">
             <a:spAutoFit/>
           </a:bodyPr>
           <a:lstStyle/>
@@ -6432,6 +6367,7 @@
           <a:lstStyle/>
           <a:p>
             <a:pPr algn="ctr"/>
+            <a:endParaRPr/>
           </a:p>
         </p:txBody>
       </p:sp>
@@ -6452,7 +6388,7 @@
           <a:noFill/>
         </p:spPr>
         <p:txBody>
-          <a:bodyPr wrap="square" lIns="36576" rIns="36576" tIns="36576" bIns="36576" anchor="ctr">
+          <a:bodyPr wrap="square" lIns="36576" tIns="36576" rIns="36576" bIns="36576" anchor="ctr">
             <a:spAutoFit/>
           </a:bodyPr>
           <a:lstStyle/>
@@ -6531,6 +6467,7 @@
           <a:lstStyle/>
           <a:p>
             <a:pPr algn="ctr"/>
+            <a:endParaRPr/>
           </a:p>
         </p:txBody>
       </p:sp>
@@ -6551,7 +6488,7 @@
           <a:noFill/>
         </p:spPr>
         <p:txBody>
-          <a:bodyPr wrap="square" lIns="36576" rIns="36576" tIns="36576" bIns="36576" anchor="ctr">
+          <a:bodyPr wrap="square" lIns="36576" tIns="36576" rIns="36576" bIns="36576" anchor="ctr">
             <a:spAutoFit/>
           </a:bodyPr>
           <a:lstStyle/>
@@ -6603,7 +6540,7 @@
           <a:noFill/>
         </p:spPr>
         <p:txBody>
-          <a:bodyPr wrap="square" lIns="0" rIns="0" tIns="0" bIns="0" anchor="ctr">
+          <a:bodyPr wrap="square" lIns="0" tIns="0" rIns="0" bIns="0" anchor="ctr">
             <a:spAutoFit/>
           </a:bodyPr>
           <a:lstStyle/>
@@ -6693,6 +6630,7 @@
           <a:lstStyle/>
           <a:p>
             <a:pPr algn="ctr"/>
+            <a:endParaRPr/>
           </a:p>
         </p:txBody>
       </p:sp>
@@ -6713,7 +6651,7 @@
           <a:noFill/>
         </p:spPr>
         <p:txBody>
-          <a:bodyPr wrap="square" lIns="36576" rIns="36576" tIns="36576" bIns="36576" anchor="t">
+          <a:bodyPr wrap="square" lIns="36576" tIns="36576" rIns="36576" bIns="36576" anchor="t">
             <a:spAutoFit/>
           </a:bodyPr>
           <a:lstStyle/>
@@ -6754,7 +6692,7 @@
           <a:noFill/>
         </p:spPr>
         <p:txBody>
-          <a:bodyPr wrap="square" lIns="0" rIns="0" tIns="0" bIns="0" anchor="ctr">
+          <a:bodyPr wrap="square" lIns="0" tIns="0" rIns="0" bIns="0" anchor="ctr">
             <a:spAutoFit/>
           </a:bodyPr>
           <a:lstStyle/>
@@ -6824,6 +6762,7 @@
           <a:lstStyle/>
           <a:p>
             <a:pPr algn="ctr"/>
+            <a:endParaRPr/>
           </a:p>
         </p:txBody>
       </p:sp>
@@ -6844,12 +6783,12 @@
           <a:noFill/>
         </p:spPr>
         <p:txBody>
-          <a:bodyPr wrap="square" lIns="36576" rIns="36576" tIns="36576" bIns="36576" anchor="ctr">
+          <a:bodyPr wrap="square" lIns="36576" tIns="36576" rIns="36576" bIns="36576" anchor="ctr">
             <a:spAutoFit/>
           </a:bodyPr>
           <a:lstStyle/>
           <a:p>
-            <a:pPr algn="l" marL="146304" indent="-146304">
+            <a:pPr marL="146304" indent="-146304" algn="l">
               <a:spcAft>
                 <a:spcPts val="500"/>
               </a:spcAft>
@@ -6880,7 +6819,7 @@
             </a:r>
           </a:p>
           <a:p>
-            <a:pPr algn="l" marL="146304" indent="-146304">
+            <a:pPr marL="146304" indent="-146304" algn="l">
               <a:spcAft>
                 <a:spcPts val="500"/>
               </a:spcAft>
@@ -6911,7 +6850,7 @@
             </a:r>
           </a:p>
           <a:p>
-            <a:pPr algn="l" marL="146304" indent="-146304">
+            <a:pPr marL="146304" indent="-146304" algn="l">
               <a:spcAft>
                 <a:spcPts val="0"/>
               </a:spcAft>
@@ -6960,7 +6899,7 @@
           <a:noFill/>
         </p:spPr>
         <p:txBody>
-          <a:bodyPr wrap="square" lIns="0" rIns="0" tIns="0" bIns="0" anchor="ctr">
+          <a:bodyPr wrap="square" lIns="0" tIns="0" rIns="0" bIns="0" anchor="ctr">
             <a:spAutoFit/>
           </a:bodyPr>
           <a:lstStyle/>
@@ -7026,6 +6965,7 @@
           <a:lstStyle/>
           <a:p>
             <a:pPr algn="ctr"/>
+            <a:endParaRPr/>
           </a:p>
         </p:txBody>
       </p:sp>
@@ -7070,7 +7010,7 @@
           <a:noFill/>
         </p:spPr>
         <p:txBody>
-          <a:bodyPr wrap="square" lIns="36576" rIns="36576" tIns="36576" bIns="36576" anchor="ctr">
+          <a:bodyPr wrap="square" lIns="36576" tIns="36576" rIns="36576" bIns="36576" anchor="ctr">
             <a:spAutoFit/>
           </a:bodyPr>
           <a:lstStyle/>
@@ -7153,7 +7093,7 @@
           <a:noFill/>
         </p:spPr>
         <p:txBody>
-          <a:bodyPr wrap="square" lIns="36576" rIns="36576" tIns="36576" bIns="36576" anchor="ctr">
+          <a:bodyPr wrap="square" lIns="36576" tIns="36576" rIns="36576" bIns="36576" anchor="ctr">
             <a:spAutoFit/>
           </a:bodyPr>
           <a:lstStyle/>
@@ -7236,7 +7176,7 @@
           <a:noFill/>
         </p:spPr>
         <p:txBody>
-          <a:bodyPr wrap="square" lIns="36576" rIns="36576" tIns="36576" bIns="36576" anchor="ctr">
+          <a:bodyPr wrap="square" lIns="36576" tIns="36576" rIns="36576" bIns="36576" anchor="ctr">
             <a:spAutoFit/>
           </a:bodyPr>
           <a:lstStyle/>
@@ -7319,7 +7259,7 @@
           <a:noFill/>
         </p:spPr>
         <p:txBody>
-          <a:bodyPr wrap="square" lIns="36576" rIns="36576" tIns="36576" bIns="36576" anchor="ctr">
+          <a:bodyPr wrap="square" lIns="36576" tIns="36576" rIns="36576" bIns="36576" anchor="ctr">
             <a:spAutoFit/>
           </a:bodyPr>
           <a:lstStyle/>
@@ -7402,7 +7342,7 @@
           <a:noFill/>
         </p:spPr>
         <p:txBody>
-          <a:bodyPr wrap="square" lIns="36576" rIns="36576" tIns="36576" bIns="36576" anchor="ctr">
+          <a:bodyPr wrap="square" lIns="36576" tIns="36576" rIns="36576" bIns="36576" anchor="ctr">
             <a:spAutoFit/>
           </a:bodyPr>
           <a:lstStyle/>
@@ -7485,7 +7425,7 @@
           <a:noFill/>
         </p:spPr>
         <p:txBody>
-          <a:bodyPr wrap="square" lIns="36576" rIns="36576" tIns="36576" bIns="36576" anchor="ctr">
+          <a:bodyPr wrap="square" lIns="36576" tIns="36576" rIns="36576" bIns="36576" anchor="ctr">
             <a:spAutoFit/>
           </a:bodyPr>
           <a:lstStyle/>
@@ -7554,70 +7494,6 @@
       </p:grpSpPr>
       <p:sp>
         <p:nvSpPr>
-          <p:cNvPr id="10" name="Rectangle 9">
-            <a:extLst>
-              <a:ext uri="{FF2B5EF4-FFF2-40B4-BE49-F238E27FC236}">
-                <a16:creationId xmlns:a16="http://schemas.microsoft.com/office/drawing/2014/main" id="{AD4F69D3-EEB0-4C4C-9434-B9960FB5854C}"/>
-              </a:ext>
-            </a:extLst>
-          </p:cNvPr>
-          <p:cNvSpPr>
-            <a:spLocks noChangeArrowheads="1"/>
-          </p:cNvSpPr>
-          <p:nvPr/>
-        </p:nvSpPr>
-        <p:spPr bwMode="auto">
-          <a:xfrm>
-            <a:off x="0" y="6354762"/>
-            <a:ext cx="12191999" cy="503238"/>
-          </a:xfrm>
-          <a:prstGeom prst="rect">
-            <a:avLst/>
-          </a:prstGeom>
-          <a:solidFill>
-            <a:srgbClr val="0070C0"/>
-          </a:solidFill>
-          <a:ln w="9525">
-            <a:noFill/>
-            <a:miter lim="800000"/>
-            <a:headEnd/>
-            <a:tailEnd/>
-          </a:ln>
-          <a:effectLst>
-            <a:outerShdw dist="23000" dir="5400000" rotWithShape="0">
-              <a:srgbClr val="808080">
-                <a:alpha val="34999"/>
-              </a:srgbClr>
-            </a:outerShdw>
-          </a:effectLst>
-        </p:spPr>
-        <p:txBody>
-          <a:bodyPr anchor="ctr"/>
-          <a:lstStyle/>
-          <a:p>
-            <a:pPr algn="ctr" fontAlgn="auto">
-              <a:spcBef>
-                <a:spcPts val="0"/>
-              </a:spcBef>
-              <a:spcAft>
-                <a:spcPts val="0"/>
-              </a:spcAft>
-              <a:defRPr/>
-            </a:pPr>
-            <a:endParaRPr lang="en-US" dirty="0">
-              <a:solidFill>
-                <a:schemeClr val="accent2">
-                  <a:lumMod val="75000"/>
-                </a:schemeClr>
-              </a:solidFill>
-              <a:latin typeface="+mn-lt"/>
-              <a:ea typeface="+mn-ea"/>
-            </a:endParaRPr>
-          </a:p>
-        </p:txBody>
-      </p:sp>
-      <p:sp>
-        <p:nvSpPr>
           <p:cNvPr id="17409" name="Title 1"/>
           <p:cNvSpPr>
             <a:spLocks noGrp="1"/>
@@ -7636,7 +7512,7 @@
           <a:bodyPr anchor="ctr"/>
           <a:lstStyle/>
           <a:p>
-            <a:pPr eaLnBrk="1" hangingPunct="1" algn="ctr"/>
+            <a:pPr algn="ctr" eaLnBrk="1" hangingPunct="1"/>
             <a:r>
               <a:rPr sz="3600" b="1" i="0">
                 <a:solidFill>
@@ -7829,7 +7705,7 @@
           <a:noFill/>
         </p:spPr>
         <p:txBody>
-          <a:bodyPr wrap="square" lIns="0" rIns="0" tIns="0" bIns="0" anchor="ctr">
+          <a:bodyPr wrap="square" lIns="0" tIns="0" rIns="0" bIns="0" anchor="ctr">
             <a:spAutoFit/>
           </a:bodyPr>
           <a:lstStyle/>
@@ -7899,6 +7775,7 @@
           <a:lstStyle/>
           <a:p>
             <a:pPr algn="ctr"/>
+            <a:endParaRPr/>
           </a:p>
         </p:txBody>
       </p:sp>
@@ -7943,6 +7820,7 @@
           <a:lstStyle/>
           <a:p>
             <a:pPr algn="ctr"/>
+            <a:endParaRPr/>
           </a:p>
         </p:txBody>
       </p:sp>
@@ -7987,7 +7865,7 @@
           <a:noFill/>
         </p:spPr>
         <p:txBody>
-          <a:bodyPr wrap="square" lIns="18288" rIns="18288" tIns="18288" bIns="18288" anchor="ctr">
+          <a:bodyPr wrap="square" lIns="18288" tIns="18288" rIns="18288" bIns="18288" anchor="ctr">
             <a:spAutoFit/>
           </a:bodyPr>
           <a:lstStyle/>
@@ -8028,7 +7906,7 @@
           <a:noFill/>
         </p:spPr>
         <p:txBody>
-          <a:bodyPr wrap="square" lIns="18288" rIns="18288" tIns="18288" bIns="18288" anchor="t">
+          <a:bodyPr wrap="square" lIns="18288" tIns="18288" rIns="18288" bIns="18288" anchor="t">
             <a:spAutoFit/>
           </a:bodyPr>
           <a:lstStyle/>
@@ -8134,6 +8012,7 @@
           <a:lstStyle/>
           <a:p>
             <a:pPr algn="ctr"/>
+            <a:endParaRPr/>
           </a:p>
         </p:txBody>
       </p:sp>
@@ -8178,6 +8057,7 @@
           <a:lstStyle/>
           <a:p>
             <a:pPr algn="ctr"/>
+            <a:endParaRPr/>
           </a:p>
         </p:txBody>
       </p:sp>
@@ -8222,7 +8102,7 @@
           <a:noFill/>
         </p:spPr>
         <p:txBody>
-          <a:bodyPr wrap="square" lIns="18288" rIns="18288" tIns="18288" bIns="18288" anchor="ctr">
+          <a:bodyPr wrap="square" lIns="18288" tIns="18288" rIns="18288" bIns="18288" anchor="ctr">
             <a:spAutoFit/>
           </a:bodyPr>
           <a:lstStyle/>
@@ -8263,7 +8143,7 @@
           <a:noFill/>
         </p:spPr>
         <p:txBody>
-          <a:bodyPr wrap="square" lIns="18288" rIns="18288" tIns="18288" bIns="18288" anchor="t">
+          <a:bodyPr wrap="square" lIns="18288" tIns="18288" rIns="18288" bIns="18288" anchor="t">
             <a:spAutoFit/>
           </a:bodyPr>
           <a:lstStyle/>
@@ -8369,6 +8249,7 @@
           <a:lstStyle/>
           <a:p>
             <a:pPr algn="ctr"/>
+            <a:endParaRPr/>
           </a:p>
         </p:txBody>
       </p:sp>
@@ -8413,6 +8294,7 @@
           <a:lstStyle/>
           <a:p>
             <a:pPr algn="ctr"/>
+            <a:endParaRPr/>
           </a:p>
         </p:txBody>
       </p:sp>
@@ -8457,7 +8339,7 @@
           <a:noFill/>
         </p:spPr>
         <p:txBody>
-          <a:bodyPr wrap="square" lIns="18288" rIns="18288" tIns="18288" bIns="18288" anchor="ctr">
+          <a:bodyPr wrap="square" lIns="18288" tIns="18288" rIns="18288" bIns="18288" anchor="ctr">
             <a:spAutoFit/>
           </a:bodyPr>
           <a:lstStyle/>
@@ -8498,7 +8380,7 @@
           <a:noFill/>
         </p:spPr>
         <p:txBody>
-          <a:bodyPr wrap="square" lIns="18288" rIns="18288" tIns="18288" bIns="18288" anchor="t">
+          <a:bodyPr wrap="square" lIns="18288" tIns="18288" rIns="18288" bIns="18288" anchor="t">
             <a:spAutoFit/>
           </a:bodyPr>
           <a:lstStyle/>
@@ -8604,6 +8486,7 @@
           <a:lstStyle/>
           <a:p>
             <a:pPr algn="ctr"/>
+            <a:endParaRPr/>
           </a:p>
         </p:txBody>
       </p:sp>
@@ -8648,6 +8531,7 @@
           <a:lstStyle/>
           <a:p>
             <a:pPr algn="ctr"/>
+            <a:endParaRPr/>
           </a:p>
         </p:txBody>
       </p:sp>
@@ -8692,7 +8576,7 @@
           <a:noFill/>
         </p:spPr>
         <p:txBody>
-          <a:bodyPr wrap="square" lIns="18288" rIns="18288" tIns="18288" bIns="18288" anchor="ctr">
+          <a:bodyPr wrap="square" lIns="18288" tIns="18288" rIns="18288" bIns="18288" anchor="ctr">
             <a:spAutoFit/>
           </a:bodyPr>
           <a:lstStyle/>
@@ -8733,7 +8617,7 @@
           <a:noFill/>
         </p:spPr>
         <p:txBody>
-          <a:bodyPr wrap="square" lIns="18288" rIns="18288" tIns="18288" bIns="18288" anchor="t">
+          <a:bodyPr wrap="square" lIns="18288" tIns="18288" rIns="18288" bIns="18288" anchor="t">
             <a:spAutoFit/>
           </a:bodyPr>
           <a:lstStyle/>
@@ -8839,6 +8723,7 @@
           <a:lstStyle/>
           <a:p>
             <a:pPr algn="ctr"/>
+            <a:endParaRPr/>
           </a:p>
         </p:txBody>
       </p:sp>
@@ -8883,6 +8768,7 @@
           <a:lstStyle/>
           <a:p>
             <a:pPr algn="ctr"/>
+            <a:endParaRPr/>
           </a:p>
         </p:txBody>
       </p:sp>
@@ -8927,7 +8813,7 @@
           <a:noFill/>
         </p:spPr>
         <p:txBody>
-          <a:bodyPr wrap="square" lIns="18288" rIns="18288" tIns="18288" bIns="18288" anchor="ctr">
+          <a:bodyPr wrap="square" lIns="18288" tIns="18288" rIns="18288" bIns="18288" anchor="ctr">
             <a:spAutoFit/>
           </a:bodyPr>
           <a:lstStyle/>
@@ -8968,7 +8854,7 @@
           <a:noFill/>
         </p:spPr>
         <p:txBody>
-          <a:bodyPr wrap="square" lIns="18288" rIns="18288" tIns="18288" bIns="18288" anchor="t">
+          <a:bodyPr wrap="square" lIns="18288" tIns="18288" rIns="18288" bIns="18288" anchor="t">
             <a:spAutoFit/>
           </a:bodyPr>
           <a:lstStyle/>
@@ -9074,6 +8960,7 @@
           <a:lstStyle/>
           <a:p>
             <a:pPr algn="ctr"/>
+            <a:endParaRPr/>
           </a:p>
         </p:txBody>
       </p:sp>
@@ -9118,6 +9005,7 @@
           <a:lstStyle/>
           <a:p>
             <a:pPr algn="ctr"/>
+            <a:endParaRPr/>
           </a:p>
         </p:txBody>
       </p:sp>
@@ -9162,7 +9050,7 @@
           <a:noFill/>
         </p:spPr>
         <p:txBody>
-          <a:bodyPr wrap="square" lIns="18288" rIns="18288" tIns="18288" bIns="18288" anchor="ctr">
+          <a:bodyPr wrap="square" lIns="18288" tIns="18288" rIns="18288" bIns="18288" anchor="ctr">
             <a:spAutoFit/>
           </a:bodyPr>
           <a:lstStyle/>
@@ -9203,7 +9091,7 @@
           <a:noFill/>
         </p:spPr>
         <p:txBody>
-          <a:bodyPr wrap="square" lIns="18288" rIns="18288" tIns="18288" bIns="18288" anchor="t">
+          <a:bodyPr wrap="square" lIns="18288" tIns="18288" rIns="18288" bIns="18288" anchor="t">
             <a:spAutoFit/>
           </a:bodyPr>
           <a:lstStyle/>
@@ -9309,6 +9197,7 @@
           <a:lstStyle/>
           <a:p>
             <a:pPr algn="ctr"/>
+            <a:endParaRPr/>
           </a:p>
         </p:txBody>
       </p:sp>
@@ -9353,6 +9242,7 @@
           <a:lstStyle/>
           <a:p>
             <a:pPr algn="ctr"/>
+            <a:endParaRPr/>
           </a:p>
         </p:txBody>
       </p:sp>
@@ -9397,7 +9287,7 @@
           <a:noFill/>
         </p:spPr>
         <p:txBody>
-          <a:bodyPr wrap="square" lIns="18288" rIns="18288" tIns="18288" bIns="18288" anchor="ctr">
+          <a:bodyPr wrap="square" lIns="18288" tIns="18288" rIns="18288" bIns="18288" anchor="ctr">
             <a:spAutoFit/>
           </a:bodyPr>
           <a:lstStyle/>
@@ -9438,7 +9328,7 @@
           <a:noFill/>
         </p:spPr>
         <p:txBody>
-          <a:bodyPr wrap="square" lIns="18288" rIns="18288" tIns="18288" bIns="18288" anchor="t">
+          <a:bodyPr wrap="square" lIns="18288" tIns="18288" rIns="18288" bIns="18288" anchor="t">
             <a:spAutoFit/>
           </a:bodyPr>
           <a:lstStyle/>
@@ -9544,6 +9434,7 @@
           <a:lstStyle/>
           <a:p>
             <a:pPr algn="ctr"/>
+            <a:endParaRPr/>
           </a:p>
         </p:txBody>
       </p:sp>
@@ -9588,6 +9479,7 @@
           <a:lstStyle/>
           <a:p>
             <a:pPr algn="ctr"/>
+            <a:endParaRPr/>
           </a:p>
         </p:txBody>
       </p:sp>
@@ -9632,7 +9524,7 @@
           <a:noFill/>
         </p:spPr>
         <p:txBody>
-          <a:bodyPr wrap="square" lIns="18288" rIns="18288" tIns="18288" bIns="18288" anchor="ctr">
+          <a:bodyPr wrap="square" lIns="18288" tIns="18288" rIns="18288" bIns="18288" anchor="ctr">
             <a:spAutoFit/>
           </a:bodyPr>
           <a:lstStyle/>
@@ -9673,7 +9565,7 @@
           <a:noFill/>
         </p:spPr>
         <p:txBody>
-          <a:bodyPr wrap="square" lIns="18288" rIns="18288" tIns="18288" bIns="18288" anchor="t">
+          <a:bodyPr wrap="square" lIns="18288" tIns="18288" rIns="18288" bIns="18288" anchor="t">
             <a:spAutoFit/>
           </a:bodyPr>
           <a:lstStyle/>
@@ -10040,7 +9932,7 @@
           <a:noFill/>
         </p:spPr>
         <p:txBody>
-          <a:bodyPr wrap="square" lIns="36576" rIns="36576" tIns="36576" bIns="36576" anchor="ctr">
+          <a:bodyPr wrap="square" lIns="36576" tIns="36576" rIns="36576" bIns="36576" anchor="ctr">
             <a:spAutoFit/>
           </a:bodyPr>
           <a:lstStyle/>
@@ -10105,7 +9997,7 @@
           <a:noFill/>
         </p:spPr>
         <p:txBody>
-          <a:bodyPr wrap="square" lIns="36576" rIns="36576" tIns="36576" bIns="36576" anchor="t">
+          <a:bodyPr wrap="square" lIns="36576" tIns="36576" rIns="36576" bIns="36576" anchor="t">
             <a:spAutoFit/>
           </a:bodyPr>
           <a:lstStyle/>
@@ -10146,7 +10038,7 @@
           <a:noFill/>
         </p:spPr>
         <p:txBody>
-          <a:bodyPr wrap="square" lIns="0" rIns="0" tIns="0" bIns="0" anchor="ctr">
+          <a:bodyPr wrap="square" lIns="0" tIns="0" rIns="0" bIns="0" anchor="ctr">
             <a:spAutoFit/>
           </a:bodyPr>
           <a:lstStyle/>
@@ -10212,6 +10104,7 @@
           <a:lstStyle/>
           <a:p>
             <a:pPr algn="ctr"/>
+            <a:endParaRPr/>
           </a:p>
         </p:txBody>
       </p:sp>
@@ -10256,7 +10149,7 @@
           <a:noFill/>
         </p:spPr>
         <p:txBody>
-          <a:bodyPr wrap="square" lIns="9144" rIns="9144" tIns="9144" bIns="9144" anchor="ctr">
+          <a:bodyPr wrap="square" lIns="9144" tIns="9144" rIns="9144" bIns="9144" anchor="ctr">
             <a:spAutoFit/>
           </a:bodyPr>
           <a:lstStyle/>
@@ -10339,7 +10232,7 @@
           <a:noFill/>
         </p:spPr>
         <p:txBody>
-          <a:bodyPr wrap="square" lIns="9144" rIns="9144" tIns="9144" bIns="9144" anchor="ctr">
+          <a:bodyPr wrap="square" lIns="9144" tIns="9144" rIns="9144" bIns="9144" anchor="ctr">
             <a:spAutoFit/>
           </a:bodyPr>
           <a:lstStyle/>
@@ -10422,7 +10315,7 @@
           <a:noFill/>
         </p:spPr>
         <p:txBody>
-          <a:bodyPr wrap="square" lIns="9144" rIns="9144" tIns="9144" bIns="9144" anchor="ctr">
+          <a:bodyPr wrap="square" lIns="9144" tIns="9144" rIns="9144" bIns="9144" anchor="ctr">
             <a:spAutoFit/>
           </a:bodyPr>
           <a:lstStyle/>
@@ -10505,7 +10398,7 @@
           <a:noFill/>
         </p:spPr>
         <p:txBody>
-          <a:bodyPr wrap="square" lIns="9144" rIns="9144" tIns="9144" bIns="9144" anchor="ctr">
+          <a:bodyPr wrap="square" lIns="9144" tIns="9144" rIns="9144" bIns="9144" anchor="ctr">
             <a:spAutoFit/>
           </a:bodyPr>
           <a:lstStyle/>
@@ -10588,7 +10481,7 @@
           <a:noFill/>
         </p:spPr>
         <p:txBody>
-          <a:bodyPr wrap="square" lIns="9144" rIns="9144" tIns="9144" bIns="9144" anchor="ctr">
+          <a:bodyPr wrap="square" lIns="9144" tIns="9144" rIns="9144" bIns="9144" anchor="ctr">
             <a:spAutoFit/>
           </a:bodyPr>
           <a:lstStyle/>
@@ -10647,7 +10540,7 @@
           <a:noFill/>
         </p:spPr>
         <p:txBody>
-          <a:bodyPr wrap="square" lIns="0" rIns="0" tIns="0" bIns="0" anchor="ctr">
+          <a:bodyPr wrap="square" lIns="0" tIns="0" rIns="0" bIns="0" anchor="ctr">
             <a:spAutoFit/>
           </a:bodyPr>
           <a:lstStyle/>
@@ -10713,6 +10606,7 @@
           <a:lstStyle/>
           <a:p>
             <a:pPr algn="ctr"/>
+            <a:endParaRPr/>
           </a:p>
         </p:txBody>
       </p:sp>
@@ -10757,6 +10651,7 @@
           <a:lstStyle/>
           <a:p>
             <a:pPr algn="ctr"/>
+            <a:endParaRPr/>
           </a:p>
         </p:txBody>
       </p:sp>
@@ -10777,7 +10672,7 @@
           <a:noFill/>
         </p:spPr>
         <p:txBody>
-          <a:bodyPr wrap="square" lIns="0" rIns="0" tIns="0" bIns="0" anchor="ctr">
+          <a:bodyPr wrap="square" lIns="0" tIns="0" rIns="0" bIns="0" anchor="ctr">
             <a:spAutoFit/>
           </a:bodyPr>
           <a:lstStyle/>
@@ -10818,7 +10713,7 @@
           <a:noFill/>
         </p:spPr>
         <p:txBody>
-          <a:bodyPr wrap="square" lIns="9144" rIns="9144" tIns="9144" bIns="9144" anchor="ctr">
+          <a:bodyPr wrap="square" lIns="9144" tIns="9144" rIns="9144" bIns="9144" anchor="ctr">
             <a:spAutoFit/>
           </a:bodyPr>
           <a:lstStyle/>
@@ -10883,6 +10778,7 @@
           <a:lstStyle/>
           <a:p>
             <a:pPr algn="ctr"/>
+            <a:endParaRPr/>
           </a:p>
         </p:txBody>
       </p:sp>
@@ -10903,7 +10799,7 @@
           <a:noFill/>
         </p:spPr>
         <p:txBody>
-          <a:bodyPr wrap="square" lIns="0" rIns="0" tIns="0" bIns="0" anchor="ctr">
+          <a:bodyPr wrap="square" lIns="0" tIns="0" rIns="0" bIns="0" anchor="ctr">
             <a:spAutoFit/>
           </a:bodyPr>
           <a:lstStyle/>
@@ -10944,7 +10840,7 @@
           <a:noFill/>
         </p:spPr>
         <p:txBody>
-          <a:bodyPr wrap="square" lIns="9144" rIns="9144" tIns="9144" bIns="9144" anchor="ctr">
+          <a:bodyPr wrap="square" lIns="9144" tIns="9144" rIns="9144" bIns="9144" anchor="ctr">
             <a:spAutoFit/>
           </a:bodyPr>
           <a:lstStyle/>
@@ -11009,6 +10905,7 @@
           <a:lstStyle/>
           <a:p>
             <a:pPr algn="ctr"/>
+            <a:endParaRPr/>
           </a:p>
         </p:txBody>
       </p:sp>
@@ -11029,7 +10926,7 @@
           <a:noFill/>
         </p:spPr>
         <p:txBody>
-          <a:bodyPr wrap="square" lIns="0" rIns="0" tIns="0" bIns="0" anchor="ctr">
+          <a:bodyPr wrap="square" lIns="0" tIns="0" rIns="0" bIns="0" anchor="ctr">
             <a:spAutoFit/>
           </a:bodyPr>
           <a:lstStyle/>
@@ -11070,7 +10967,7 @@
           <a:noFill/>
         </p:spPr>
         <p:txBody>
-          <a:bodyPr wrap="square" lIns="9144" rIns="9144" tIns="9144" bIns="9144" anchor="ctr">
+          <a:bodyPr wrap="square" lIns="9144" tIns="9144" rIns="9144" bIns="9144" anchor="ctr">
             <a:spAutoFit/>
           </a:bodyPr>
           <a:lstStyle/>
@@ -11135,6 +11032,7 @@
           <a:lstStyle/>
           <a:p>
             <a:pPr algn="ctr"/>
+            <a:endParaRPr/>
           </a:p>
         </p:txBody>
       </p:sp>
@@ -11155,7 +11053,7 @@
           <a:noFill/>
         </p:spPr>
         <p:txBody>
-          <a:bodyPr wrap="square" lIns="0" rIns="0" tIns="0" bIns="0" anchor="ctr">
+          <a:bodyPr wrap="square" lIns="0" tIns="0" rIns="0" bIns="0" anchor="ctr">
             <a:spAutoFit/>
           </a:bodyPr>
           <a:lstStyle/>
@@ -11196,7 +11094,7 @@
           <a:noFill/>
         </p:spPr>
         <p:txBody>
-          <a:bodyPr wrap="square" lIns="9144" rIns="9144" tIns="9144" bIns="9144" anchor="ctr">
+          <a:bodyPr wrap="square" lIns="9144" tIns="9144" rIns="9144" bIns="9144" anchor="ctr">
             <a:spAutoFit/>
           </a:bodyPr>
           <a:lstStyle/>
@@ -11261,6 +11159,7 @@
           <a:lstStyle/>
           <a:p>
             <a:pPr algn="ctr"/>
+            <a:endParaRPr/>
           </a:p>
         </p:txBody>
       </p:sp>
@@ -11281,7 +11180,7 @@
           <a:noFill/>
         </p:spPr>
         <p:txBody>
-          <a:bodyPr wrap="square" lIns="0" rIns="0" tIns="0" bIns="0" anchor="ctr">
+          <a:bodyPr wrap="square" lIns="0" tIns="0" rIns="0" bIns="0" anchor="ctr">
             <a:spAutoFit/>
           </a:bodyPr>
           <a:lstStyle/>
@@ -11322,7 +11221,7 @@
           <a:noFill/>
         </p:spPr>
         <p:txBody>
-          <a:bodyPr wrap="square" lIns="9144" rIns="9144" tIns="9144" bIns="9144" anchor="ctr">
+          <a:bodyPr wrap="square" lIns="9144" tIns="9144" rIns="9144" bIns="9144" anchor="ctr">
             <a:spAutoFit/>
           </a:bodyPr>
           <a:lstStyle/>
@@ -11373,85 +11272,6 @@
       </p:grpSpPr>
       <p:sp>
         <p:nvSpPr>
-          <p:cNvPr id="10" name="Rectangle 9">
-            <a:extLst>
-              <a:ext uri="{FF2B5EF4-FFF2-40B4-BE49-F238E27FC236}">
-                <a16:creationId xmlns:a16="http://schemas.microsoft.com/office/drawing/2014/main" id="{AD4F69D3-EEB0-4C4C-9434-B9960FB5854C}"/>
-              </a:ext>
-            </a:extLst>
-          </p:cNvPr>
-          <p:cNvSpPr>
-            <a:spLocks noChangeArrowheads="1"/>
-          </p:cNvSpPr>
-          <p:nvPr/>
-        </p:nvSpPr>
-        <p:spPr bwMode="auto">
-          <a:xfrm>
-            <a:off x="0" y="6354762"/>
-            <a:ext cx="12191999" cy="503238"/>
-          </a:xfrm>
-          <a:prstGeom prst="rect">
-            <a:avLst/>
-          </a:prstGeom>
-          <a:solidFill>
-            <a:srgbClr val="0070C0"/>
-          </a:solidFill>
-          <a:ln w="9525">
-            <a:noFill/>
-            <a:miter lim="800000"/>
-            <a:headEnd/>
-            <a:tailEnd/>
-          </a:ln>
-          <a:effectLst>
-            <a:outerShdw dist="23000" dir="5400000" rotWithShape="0">
-              <a:srgbClr val="808080">
-                <a:alpha val="34999"/>
-              </a:srgbClr>
-            </a:outerShdw>
-          </a:effectLst>
-        </p:spPr>
-        <p:txBody>
-          <a:bodyPr anchor="ctr"/>
-          <a:lstStyle/>
-          <a:p>
-            <a:pPr marL="0" marR="0" lvl="0" indent="0" algn="ctr" defTabSz="457200" rtl="0" eaLnBrk="1" fontAlgn="auto" latinLnBrk="0" hangingPunct="1">
-              <a:lnSpc>
-                <a:spcPct val="100000"/>
-              </a:lnSpc>
-              <a:spcBef>
-                <a:spcPts val="0"/>
-              </a:spcBef>
-              <a:spcAft>
-                <a:spcPts val="0"/>
-              </a:spcAft>
-              <a:buClrTx/>
-              <a:buSzTx/>
-              <a:buFontTx/>
-              <a:buNone/>
-              <a:tabLst/>
-              <a:defRPr/>
-            </a:pPr>
-            <a:endParaRPr kumimoji="0" lang="en-US" sz="1800" b="0" i="0" u="none" strike="noStrike" kern="1200" cap="none" spc="0" normalizeH="0" baseline="0" noProof="0" dirty="0">
-              <a:ln>
-                <a:noFill/>
-              </a:ln>
-              <a:solidFill>
-                <a:srgbClr val="C0504D">
-                  <a:lumMod val="75000"/>
-                </a:srgbClr>
-              </a:solidFill>
-              <a:effectLst/>
-              <a:uLnTx/>
-              <a:uFillTx/>
-              <a:latin typeface="Calibri"/>
-              <a:ea typeface="ＭＳ Ｐゴシック" pitchFamily="1" charset="-128"/>
-              <a:cs typeface="+mn-cs"/>
-            </a:endParaRPr>
-          </a:p>
-        </p:txBody>
-      </p:sp>
-      <p:sp>
-        <p:nvSpPr>
           <p:cNvPr id="17409" name="Title 1"/>
           <p:cNvSpPr>
             <a:spLocks noGrp="1"/>
@@ -11470,7 +11290,7 @@
           <a:bodyPr anchor="ctr"/>
           <a:lstStyle/>
           <a:p>
-            <a:pPr eaLnBrk="1" hangingPunct="1" algn="ctr"/>
+            <a:pPr algn="ctr" eaLnBrk="1" hangingPunct="1"/>
             <a:r>
               <a:rPr sz="3600" b="1" i="0">
                 <a:solidFill>
@@ -11746,7 +11566,7 @@
           <a:noFill/>
         </p:spPr>
         <p:txBody>
-          <a:bodyPr wrap="square" lIns="0" rIns="0" tIns="0" bIns="0" anchor="ctr">
+          <a:bodyPr wrap="square" lIns="0" tIns="0" rIns="0" bIns="0" anchor="ctr">
             <a:spAutoFit/>
           </a:bodyPr>
           <a:lstStyle/>
@@ -11812,6 +11632,7 @@
           <a:lstStyle/>
           <a:p>
             <a:pPr algn="ctr"/>
+            <a:endParaRPr/>
           </a:p>
         </p:txBody>
       </p:sp>
@@ -11832,12 +11653,12 @@
           <a:noFill/>
         </p:spPr>
         <p:txBody>
-          <a:bodyPr wrap="square" lIns="36576" rIns="36576" tIns="36576" bIns="36576" anchor="ctr">
+          <a:bodyPr wrap="square" lIns="36576" tIns="36576" rIns="36576" bIns="36576" anchor="ctr">
             <a:spAutoFit/>
           </a:bodyPr>
           <a:lstStyle/>
           <a:p>
-            <a:pPr algn="l" marL="146304" indent="-146304">
+            <a:pPr marL="146304" indent="-146304" algn="l">
               <a:spcAft>
                 <a:spcPts val="400"/>
               </a:spcAft>
@@ -11868,7 +11689,7 @@
             </a:r>
           </a:p>
           <a:p>
-            <a:pPr algn="l" marL="146304" indent="-146304">
+            <a:pPr marL="146304" indent="-146304" algn="l">
               <a:spcAft>
                 <a:spcPts val="400"/>
               </a:spcAft>
@@ -11899,7 +11720,7 @@
             </a:r>
           </a:p>
           <a:p>
-            <a:pPr algn="l" marL="146304" indent="-146304">
+            <a:pPr marL="146304" indent="-146304" algn="l">
               <a:spcAft>
                 <a:spcPts val="400"/>
               </a:spcAft>
@@ -11930,7 +11751,7 @@
             </a:r>
           </a:p>
           <a:p>
-            <a:pPr algn="l" marL="146304" indent="-146304">
+            <a:pPr marL="146304" indent="-146304" algn="l">
               <a:spcAft>
                 <a:spcPts val="0"/>
               </a:spcAft>
@@ -11979,7 +11800,7 @@
           <a:noFill/>
         </p:spPr>
         <p:txBody>
-          <a:bodyPr wrap="square" lIns="0" rIns="0" tIns="0" bIns="0" anchor="ctr">
+          <a:bodyPr wrap="square" lIns="0" tIns="0" rIns="0" bIns="0" anchor="ctr">
             <a:spAutoFit/>
           </a:bodyPr>
           <a:lstStyle/>
@@ -12022,16 +11843,46 @@
                 <a:tableStyleId>{5C22544A-7EE6-4342-B048-85BDC9FD1C3A}</a:tableStyleId>
               </a:tblPr>
               <a:tblGrid>
-                <a:gridCol w="1417320"/>
-                <a:gridCol w="685800"/>
-                <a:gridCol w="566928"/>
-                <a:gridCol w="822960"/>
-                <a:gridCol w="850392"/>
+                <a:gridCol w="1417320">
+                  <a:extLst>
+                    <a:ext uri="{9D8B030D-6E8A-4147-A177-3AD203B41FA5}">
+                      <a16:colId xmlns:a16="http://schemas.microsoft.com/office/drawing/2014/main" val="20000"/>
+                    </a:ext>
+                  </a:extLst>
+                </a:gridCol>
+                <a:gridCol w="685800">
+                  <a:extLst>
+                    <a:ext uri="{9D8B030D-6E8A-4147-A177-3AD203B41FA5}">
+                      <a16:colId xmlns:a16="http://schemas.microsoft.com/office/drawing/2014/main" val="20001"/>
+                    </a:ext>
+                  </a:extLst>
+                </a:gridCol>
+                <a:gridCol w="566928">
+                  <a:extLst>
+                    <a:ext uri="{9D8B030D-6E8A-4147-A177-3AD203B41FA5}">
+                      <a16:colId xmlns:a16="http://schemas.microsoft.com/office/drawing/2014/main" val="20002"/>
+                    </a:ext>
+                  </a:extLst>
+                </a:gridCol>
+                <a:gridCol w="822960">
+                  <a:extLst>
+                    <a:ext uri="{9D8B030D-6E8A-4147-A177-3AD203B41FA5}">
+                      <a16:colId xmlns:a16="http://schemas.microsoft.com/office/drawing/2014/main" val="20003"/>
+                    </a:ext>
+                  </a:extLst>
+                </a:gridCol>
+                <a:gridCol w="850392">
+                  <a:extLst>
+                    <a:ext uri="{9D8B030D-6E8A-4147-A177-3AD203B41FA5}">
+                      <a16:colId xmlns:a16="http://schemas.microsoft.com/office/drawing/2014/main" val="20004"/>
+                    </a:ext>
+                  </a:extLst>
+                </a:gridCol>
               </a:tblGrid>
               <a:tr h="288036">
                 <a:tc>
                   <a:txBody>
-                    <a:bodyPr wrap="square"/>
+                    <a:bodyPr/>
                     <a:lstStyle/>
                     <a:p>
                       <a:pPr algn="l"/>
@@ -12056,7 +11907,7 @@
                 </a:tc>
                 <a:tc>
                   <a:txBody>
-                    <a:bodyPr wrap="square"/>
+                    <a:bodyPr/>
                     <a:lstStyle/>
                     <a:p>
                       <a:pPr algn="ctr"/>
@@ -12081,7 +11932,7 @@
                 </a:tc>
                 <a:tc>
                   <a:txBody>
-                    <a:bodyPr wrap="square"/>
+                    <a:bodyPr/>
                     <a:lstStyle/>
                     <a:p>
                       <a:pPr algn="ctr"/>
@@ -12106,7 +11957,7 @@
                 </a:tc>
                 <a:tc>
                   <a:txBody>
-                    <a:bodyPr wrap="square"/>
+                    <a:bodyPr/>
                     <a:lstStyle/>
                     <a:p>
                       <a:pPr algn="ctr"/>
@@ -12131,7 +11982,7 @@
                 </a:tc>
                 <a:tc>
                   <a:txBody>
-                    <a:bodyPr wrap="square"/>
+                    <a:bodyPr/>
                     <a:lstStyle/>
                     <a:p>
                       <a:pPr algn="ctr"/>
@@ -12154,11 +12005,16 @@
                     </a:solidFill>
                   </a:tcPr>
                 </a:tc>
+                <a:extLst>
+                  <a:ext uri="{0D108BD9-81ED-4DB2-BD59-A6C34878D82A}">
+                    <a16:rowId xmlns:a16="http://schemas.microsoft.com/office/drawing/2014/main" val="10000"/>
+                  </a:ext>
+                </a:extLst>
               </a:tr>
               <a:tr h="288036">
                 <a:tc>
                   <a:txBody>
-                    <a:bodyPr wrap="square"/>
+                    <a:bodyPr/>
                     <a:lstStyle/>
                     <a:p>
                       <a:pPr algn="l"/>
@@ -12183,7 +12039,7 @@
                 </a:tc>
                 <a:tc>
                   <a:txBody>
-                    <a:bodyPr wrap="square"/>
+                    <a:bodyPr/>
                     <a:lstStyle/>
                     <a:p>
                       <a:pPr algn="ctr"/>
@@ -12208,7 +12064,7 @@
                 </a:tc>
                 <a:tc>
                   <a:txBody>
-                    <a:bodyPr wrap="square"/>
+                    <a:bodyPr/>
                     <a:lstStyle/>
                     <a:p>
                       <a:pPr algn="ctr"/>
@@ -12233,7 +12089,7 @@
                 </a:tc>
                 <a:tc>
                   <a:txBody>
-                    <a:bodyPr wrap="square"/>
+                    <a:bodyPr/>
                     <a:lstStyle/>
                     <a:p>
                       <a:pPr algn="ctr"/>
@@ -12258,7 +12114,7 @@
                 </a:tc>
                 <a:tc>
                   <a:txBody>
-                    <a:bodyPr wrap="square"/>
+                    <a:bodyPr/>
                     <a:lstStyle/>
                     <a:p>
                       <a:pPr algn="ctr"/>
@@ -12281,11 +12137,16 @@
                     </a:solidFill>
                   </a:tcPr>
                 </a:tc>
+                <a:extLst>
+                  <a:ext uri="{0D108BD9-81ED-4DB2-BD59-A6C34878D82A}">
+                    <a16:rowId xmlns:a16="http://schemas.microsoft.com/office/drawing/2014/main" val="10001"/>
+                  </a:ext>
+                </a:extLst>
               </a:tr>
               <a:tr h="288036">
                 <a:tc>
                   <a:txBody>
-                    <a:bodyPr wrap="square"/>
+                    <a:bodyPr/>
                     <a:lstStyle/>
                     <a:p>
                       <a:pPr algn="l"/>
@@ -12310,7 +12171,7 @@
                 </a:tc>
                 <a:tc>
                   <a:txBody>
-                    <a:bodyPr wrap="square"/>
+                    <a:bodyPr/>
                     <a:lstStyle/>
                     <a:p>
                       <a:pPr algn="ctr"/>
@@ -12335,7 +12196,7 @@
                 </a:tc>
                 <a:tc>
                   <a:txBody>
-                    <a:bodyPr wrap="square"/>
+                    <a:bodyPr/>
                     <a:lstStyle/>
                     <a:p>
                       <a:pPr algn="ctr"/>
@@ -12360,7 +12221,7 @@
                 </a:tc>
                 <a:tc>
                   <a:txBody>
-                    <a:bodyPr wrap="square"/>
+                    <a:bodyPr/>
                     <a:lstStyle/>
                     <a:p>
                       <a:pPr algn="ctr"/>
@@ -12385,7 +12246,7 @@
                 </a:tc>
                 <a:tc>
                   <a:txBody>
-                    <a:bodyPr wrap="square"/>
+                    <a:bodyPr/>
                     <a:lstStyle/>
                     <a:p>
                       <a:pPr algn="ctr"/>
@@ -12408,11 +12269,16 @@
                     </a:solidFill>
                   </a:tcPr>
                 </a:tc>
+                <a:extLst>
+                  <a:ext uri="{0D108BD9-81ED-4DB2-BD59-A6C34878D82A}">
+                    <a16:rowId xmlns:a16="http://schemas.microsoft.com/office/drawing/2014/main" val="10002"/>
+                  </a:ext>
+                </a:extLst>
               </a:tr>
               <a:tr h="288036">
                 <a:tc>
                   <a:txBody>
-                    <a:bodyPr wrap="square"/>
+                    <a:bodyPr/>
                     <a:lstStyle/>
                     <a:p>
                       <a:pPr algn="l"/>
@@ -12437,7 +12303,7 @@
                 </a:tc>
                 <a:tc>
                   <a:txBody>
-                    <a:bodyPr wrap="square"/>
+                    <a:bodyPr/>
                     <a:lstStyle/>
                     <a:p>
                       <a:pPr algn="ctr"/>
@@ -12462,7 +12328,7 @@
                 </a:tc>
                 <a:tc>
                   <a:txBody>
-                    <a:bodyPr wrap="square"/>
+                    <a:bodyPr/>
                     <a:lstStyle/>
                     <a:p>
                       <a:pPr algn="ctr"/>
@@ -12487,7 +12353,7 @@
                 </a:tc>
                 <a:tc>
                   <a:txBody>
-                    <a:bodyPr wrap="square"/>
+                    <a:bodyPr/>
                     <a:lstStyle/>
                     <a:p>
                       <a:pPr algn="ctr"/>
@@ -12512,7 +12378,7 @@
                 </a:tc>
                 <a:tc>
                   <a:txBody>
-                    <a:bodyPr wrap="square"/>
+                    <a:bodyPr/>
                     <a:lstStyle/>
                     <a:p>
                       <a:pPr algn="ctr"/>
@@ -12535,11 +12401,16 @@
                     </a:solidFill>
                   </a:tcPr>
                 </a:tc>
+                <a:extLst>
+                  <a:ext uri="{0D108BD9-81ED-4DB2-BD59-A6C34878D82A}">
+                    <a16:rowId xmlns:a16="http://schemas.microsoft.com/office/drawing/2014/main" val="10003"/>
+                  </a:ext>
+                </a:extLst>
               </a:tr>
               <a:tr h="288036">
                 <a:tc>
                   <a:txBody>
-                    <a:bodyPr wrap="square"/>
+                    <a:bodyPr/>
                     <a:lstStyle/>
                     <a:p>
                       <a:pPr algn="l"/>
@@ -12564,7 +12435,7 @@
                 </a:tc>
                 <a:tc>
                   <a:txBody>
-                    <a:bodyPr wrap="square"/>
+                    <a:bodyPr/>
                     <a:lstStyle/>
                     <a:p>
                       <a:pPr algn="ctr"/>
@@ -12589,7 +12460,7 @@
                 </a:tc>
                 <a:tc>
                   <a:txBody>
-                    <a:bodyPr wrap="square"/>
+                    <a:bodyPr/>
                     <a:lstStyle/>
                     <a:p>
                       <a:pPr algn="ctr"/>
@@ -12614,7 +12485,7 @@
                 </a:tc>
                 <a:tc>
                   <a:txBody>
-                    <a:bodyPr wrap="square"/>
+                    <a:bodyPr/>
                     <a:lstStyle/>
                     <a:p>
                       <a:pPr algn="ctr"/>
@@ -12639,7 +12510,7 @@
                 </a:tc>
                 <a:tc>
                   <a:txBody>
-                    <a:bodyPr wrap="square"/>
+                    <a:bodyPr/>
                     <a:lstStyle/>
                     <a:p>
                       <a:pPr algn="ctr"/>
@@ -12662,11 +12533,16 @@
                     </a:solidFill>
                   </a:tcPr>
                 </a:tc>
+                <a:extLst>
+                  <a:ext uri="{0D108BD9-81ED-4DB2-BD59-A6C34878D82A}">
+                    <a16:rowId xmlns:a16="http://schemas.microsoft.com/office/drawing/2014/main" val="10004"/>
+                  </a:ext>
+                </a:extLst>
               </a:tr>
               <a:tr h="288036">
                 <a:tc>
                   <a:txBody>
-                    <a:bodyPr wrap="square"/>
+                    <a:bodyPr/>
                     <a:lstStyle/>
                     <a:p>
                       <a:pPr algn="l"/>
@@ -12691,7 +12567,7 @@
                 </a:tc>
                 <a:tc>
                   <a:txBody>
-                    <a:bodyPr wrap="square"/>
+                    <a:bodyPr/>
                     <a:lstStyle/>
                     <a:p>
                       <a:pPr algn="ctr"/>
@@ -12716,7 +12592,7 @@
                 </a:tc>
                 <a:tc>
                   <a:txBody>
-                    <a:bodyPr wrap="square"/>
+                    <a:bodyPr/>
                     <a:lstStyle/>
                     <a:p>
                       <a:pPr algn="ctr"/>
@@ -12741,7 +12617,7 @@
                 </a:tc>
                 <a:tc>
                   <a:txBody>
-                    <a:bodyPr wrap="square"/>
+                    <a:bodyPr/>
                     <a:lstStyle/>
                     <a:p>
                       <a:pPr algn="ctr"/>
@@ -12766,7 +12642,7 @@
                 </a:tc>
                 <a:tc>
                   <a:txBody>
-                    <a:bodyPr wrap="square"/>
+                    <a:bodyPr/>
                     <a:lstStyle/>
                     <a:p>
                       <a:pPr algn="ctr"/>
@@ -12789,6 +12665,11 @@
                     </a:solidFill>
                   </a:tcPr>
                 </a:tc>
+                <a:extLst>
+                  <a:ext uri="{0D108BD9-81ED-4DB2-BD59-A6C34878D82A}">
+                    <a16:rowId xmlns:a16="http://schemas.microsoft.com/office/drawing/2014/main" val="10005"/>
+                  </a:ext>
+                </a:extLst>
               </a:tr>
             </a:tbl>
           </a:graphicData>
@@ -12811,7 +12692,7 @@
           <a:noFill/>
         </p:spPr>
         <p:txBody>
-          <a:bodyPr wrap="square" lIns="36576" rIns="36576" tIns="36576" bIns="36576" anchor="t">
+          <a:bodyPr wrap="square" lIns="36576" tIns="36576" rIns="36576" bIns="36576" anchor="t">
             <a:spAutoFit/>
           </a:bodyPr>
           <a:lstStyle/>
@@ -12852,7 +12733,7 @@
           <a:noFill/>
         </p:spPr>
         <p:txBody>
-          <a:bodyPr wrap="square" lIns="0" rIns="0" tIns="0" bIns="0" anchor="ctr">
+          <a:bodyPr wrap="square" lIns="0" tIns="0" rIns="0" bIns="0" anchor="ctr">
             <a:spAutoFit/>
           </a:bodyPr>
           <a:lstStyle/>
@@ -12918,6 +12799,7 @@
           <a:lstStyle/>
           <a:p>
             <a:pPr algn="ctr"/>
+            <a:endParaRPr/>
           </a:p>
         </p:txBody>
       </p:sp>
@@ -12938,7 +12820,7 @@
           <a:noFill/>
         </p:spPr>
         <p:txBody>
-          <a:bodyPr wrap="square" lIns="36576" rIns="36576" tIns="36576" bIns="36576" anchor="ctr">
+          <a:bodyPr wrap="square" lIns="36576" tIns="36576" rIns="36576" bIns="36576" anchor="ctr">
             <a:spAutoFit/>
           </a:bodyPr>
           <a:lstStyle/>
@@ -13077,7 +12959,7 @@
           <a:noFill/>
         </p:spPr>
         <p:txBody>
-          <a:bodyPr wrap="square" lIns="0" rIns="0" tIns="0" bIns="0" anchor="ctr">
+          <a:bodyPr wrap="square" lIns="0" tIns="0" rIns="0" bIns="0" anchor="ctr">
             <a:spAutoFit/>
           </a:bodyPr>
           <a:lstStyle/>
@@ -13111,7 +12993,7 @@
         </p:nvGraphicFramePr>
         <p:xfrm>
           <a:off x="274320" y="4315968"/>
-          <a:ext cx="11658600" cy="1892808"/>
+          <a:ext cx="11658600" cy="1933956"/>
         </p:xfrm>
         <a:graphic>
           <a:graphicData uri="http://schemas.openxmlformats.org/drawingml/2006/table">
@@ -13120,14 +13002,32 @@
                 <a:tableStyleId>{5C22544A-7EE6-4342-B048-85BDC9FD1C3A}</a:tableStyleId>
               </a:tblPr>
               <a:tblGrid>
-                <a:gridCol w="411480"/>
-                <a:gridCol w="4434840"/>
-                <a:gridCol w="6812280"/>
+                <a:gridCol w="411480">
+                  <a:extLst>
+                    <a:ext uri="{9D8B030D-6E8A-4147-A177-3AD203B41FA5}">
+                      <a16:colId xmlns:a16="http://schemas.microsoft.com/office/drawing/2014/main" val="20000"/>
+                    </a:ext>
+                  </a:extLst>
+                </a:gridCol>
+                <a:gridCol w="4434840">
+                  <a:extLst>
+                    <a:ext uri="{9D8B030D-6E8A-4147-A177-3AD203B41FA5}">
+                      <a16:colId xmlns:a16="http://schemas.microsoft.com/office/drawing/2014/main" val="20001"/>
+                    </a:ext>
+                  </a:extLst>
+                </a:gridCol>
+                <a:gridCol w="6812280">
+                  <a:extLst>
+                    <a:ext uri="{9D8B030D-6E8A-4147-A177-3AD203B41FA5}">
+                      <a16:colId xmlns:a16="http://schemas.microsoft.com/office/drawing/2014/main" val="20002"/>
+                    </a:ext>
+                  </a:extLst>
+                </a:gridCol>
               </a:tblGrid>
               <a:tr h="315468">
                 <a:tc>
                   <a:txBody>
-                    <a:bodyPr wrap="square"/>
+                    <a:bodyPr/>
                     <a:lstStyle/>
                     <a:p>
                       <a:pPr algn="ctr"/>
@@ -13152,7 +13052,7 @@
                 </a:tc>
                 <a:tc>
                   <a:txBody>
-                    <a:bodyPr wrap="square"/>
+                    <a:bodyPr/>
                     <a:lstStyle/>
                     <a:p>
                       <a:pPr algn="l"/>
@@ -13177,7 +13077,7 @@
                 </a:tc>
                 <a:tc>
                   <a:txBody>
-                    <a:bodyPr wrap="square"/>
+                    <a:bodyPr/>
                     <a:lstStyle/>
                     <a:p>
                       <a:pPr algn="l"/>
@@ -13200,11 +13100,16 @@
                     </a:solidFill>
                   </a:tcPr>
                 </a:tc>
+                <a:extLst>
+                  <a:ext uri="{0D108BD9-81ED-4DB2-BD59-A6C34878D82A}">
+                    <a16:rowId xmlns:a16="http://schemas.microsoft.com/office/drawing/2014/main" val="10000"/>
+                  </a:ext>
+                </a:extLst>
               </a:tr>
               <a:tr h="315468">
                 <a:tc>
                   <a:txBody>
-                    <a:bodyPr wrap="square"/>
+                    <a:bodyPr/>
                     <a:lstStyle/>
                     <a:p>
                       <a:pPr algn="ctr"/>
@@ -13229,7 +13134,7 @@
                 </a:tc>
                 <a:tc>
                   <a:txBody>
-                    <a:bodyPr wrap="square"/>
+                    <a:bodyPr/>
                     <a:lstStyle/>
                     <a:p>
                       <a:pPr algn="l"/>
@@ -13254,7 +13159,7 @@
                 </a:tc>
                 <a:tc>
                   <a:txBody>
-                    <a:bodyPr wrap="square"/>
+                    <a:bodyPr/>
                     <a:lstStyle/>
                     <a:p>
                       <a:pPr algn="l"/>
@@ -13277,11 +13182,16 @@
                     </a:solidFill>
                   </a:tcPr>
                 </a:tc>
+                <a:extLst>
+                  <a:ext uri="{0D108BD9-81ED-4DB2-BD59-A6C34878D82A}">
+                    <a16:rowId xmlns:a16="http://schemas.microsoft.com/office/drawing/2014/main" val="10001"/>
+                  </a:ext>
+                </a:extLst>
               </a:tr>
               <a:tr h="315468">
                 <a:tc>
                   <a:txBody>
-                    <a:bodyPr wrap="square"/>
+                    <a:bodyPr/>
                     <a:lstStyle/>
                     <a:p>
                       <a:pPr algn="ctr"/>
@@ -13306,7 +13216,7 @@
                 </a:tc>
                 <a:tc>
                   <a:txBody>
-                    <a:bodyPr wrap="square"/>
+                    <a:bodyPr/>
                     <a:lstStyle/>
                     <a:p>
                       <a:pPr algn="l"/>
@@ -13331,7 +13241,7 @@
                 </a:tc>
                 <a:tc>
                   <a:txBody>
-                    <a:bodyPr wrap="square"/>
+                    <a:bodyPr/>
                     <a:lstStyle/>
                     <a:p>
                       <a:pPr algn="l"/>
@@ -13354,11 +13264,16 @@
                     </a:solidFill>
                   </a:tcPr>
                 </a:tc>
+                <a:extLst>
+                  <a:ext uri="{0D108BD9-81ED-4DB2-BD59-A6C34878D82A}">
+                    <a16:rowId xmlns:a16="http://schemas.microsoft.com/office/drawing/2014/main" val="10002"/>
+                  </a:ext>
+                </a:extLst>
               </a:tr>
               <a:tr h="315468">
                 <a:tc>
                   <a:txBody>
-                    <a:bodyPr wrap="square"/>
+                    <a:bodyPr/>
                     <a:lstStyle/>
                     <a:p>
                       <a:pPr algn="ctr"/>
@@ -13383,7 +13298,7 @@
                 </a:tc>
                 <a:tc>
                   <a:txBody>
-                    <a:bodyPr wrap="square"/>
+                    <a:bodyPr/>
                     <a:lstStyle/>
                     <a:p>
                       <a:pPr algn="l"/>
@@ -13408,7 +13323,7 @@
                 </a:tc>
                 <a:tc>
                   <a:txBody>
-                    <a:bodyPr wrap="square"/>
+                    <a:bodyPr/>
                     <a:lstStyle/>
                     <a:p>
                       <a:pPr algn="l"/>
@@ -13431,11 +13346,16 @@
                     </a:solidFill>
                   </a:tcPr>
                 </a:tc>
+                <a:extLst>
+                  <a:ext uri="{0D108BD9-81ED-4DB2-BD59-A6C34878D82A}">
+                    <a16:rowId xmlns:a16="http://schemas.microsoft.com/office/drawing/2014/main" val="10003"/>
+                  </a:ext>
+                </a:extLst>
               </a:tr>
               <a:tr h="315468">
                 <a:tc>
                   <a:txBody>
-                    <a:bodyPr wrap="square"/>
+                    <a:bodyPr/>
                     <a:lstStyle/>
                     <a:p>
                       <a:pPr algn="ctr"/>
@@ -13460,7 +13380,7 @@
                 </a:tc>
                 <a:tc>
                   <a:txBody>
-                    <a:bodyPr wrap="square"/>
+                    <a:bodyPr/>
                     <a:lstStyle/>
                     <a:p>
                       <a:pPr algn="l"/>
@@ -13485,7 +13405,7 @@
                 </a:tc>
                 <a:tc>
                   <a:txBody>
-                    <a:bodyPr wrap="square"/>
+                    <a:bodyPr/>
                     <a:lstStyle/>
                     <a:p>
                       <a:pPr algn="l"/>
@@ -13508,11 +13428,16 @@
                     </a:solidFill>
                   </a:tcPr>
                 </a:tc>
+                <a:extLst>
+                  <a:ext uri="{0D108BD9-81ED-4DB2-BD59-A6C34878D82A}">
+                    <a16:rowId xmlns:a16="http://schemas.microsoft.com/office/drawing/2014/main" val="10004"/>
+                  </a:ext>
+                </a:extLst>
               </a:tr>
               <a:tr h="315468">
                 <a:tc>
                   <a:txBody>
-                    <a:bodyPr wrap="square"/>
+                    <a:bodyPr/>
                     <a:lstStyle/>
                     <a:p>
                       <a:pPr algn="ctr"/>
@@ -13537,7 +13462,7 @@
                 </a:tc>
                 <a:tc>
                   <a:txBody>
-                    <a:bodyPr wrap="square"/>
+                    <a:bodyPr/>
                     <a:lstStyle/>
                     <a:p>
                       <a:pPr algn="l"/>
@@ -13562,7 +13487,7 @@
                 </a:tc>
                 <a:tc>
                   <a:txBody>
-                    <a:bodyPr wrap="square"/>
+                    <a:bodyPr/>
                     <a:lstStyle/>
                     <a:p>
                       <a:pPr algn="l"/>
@@ -13585,6 +13510,11 @@
                     </a:solidFill>
                   </a:tcPr>
                 </a:tc>
+                <a:extLst>
+                  <a:ext uri="{0D108BD9-81ED-4DB2-BD59-A6C34878D82A}">
+                    <a16:rowId xmlns:a16="http://schemas.microsoft.com/office/drawing/2014/main" val="10005"/>
+                  </a:ext>
+                </a:extLst>
               </a:tr>
             </a:tbl>
           </a:graphicData>
@@ -13622,85 +13552,6 @@
       </p:grpSpPr>
       <p:sp>
         <p:nvSpPr>
-          <p:cNvPr id="10" name="Rectangle 9">
-            <a:extLst>
-              <a:ext uri="{FF2B5EF4-FFF2-40B4-BE49-F238E27FC236}">
-                <a16:creationId xmlns:a16="http://schemas.microsoft.com/office/drawing/2014/main" id="{AD4F69D3-EEB0-4C4C-9434-B9960FB5854C}"/>
-              </a:ext>
-            </a:extLst>
-          </p:cNvPr>
-          <p:cNvSpPr>
-            <a:spLocks noChangeArrowheads="1"/>
-          </p:cNvSpPr>
-          <p:nvPr/>
-        </p:nvSpPr>
-        <p:spPr bwMode="auto">
-          <a:xfrm>
-            <a:off x="0" y="6354762"/>
-            <a:ext cx="12191999" cy="503238"/>
-          </a:xfrm>
-          <a:prstGeom prst="rect">
-            <a:avLst/>
-          </a:prstGeom>
-          <a:solidFill>
-            <a:srgbClr val="0070C0"/>
-          </a:solidFill>
-          <a:ln w="9525">
-            <a:noFill/>
-            <a:miter lim="800000"/>
-            <a:headEnd/>
-            <a:tailEnd/>
-          </a:ln>
-          <a:effectLst>
-            <a:outerShdw dist="23000" dir="5400000" rotWithShape="0">
-              <a:srgbClr val="808080">
-                <a:alpha val="34999"/>
-              </a:srgbClr>
-            </a:outerShdw>
-          </a:effectLst>
-        </p:spPr>
-        <p:txBody>
-          <a:bodyPr anchor="ctr"/>
-          <a:lstStyle/>
-          <a:p>
-            <a:pPr marL="0" marR="0" lvl="0" indent="0" algn="ctr" defTabSz="457200" rtl="0" eaLnBrk="1" fontAlgn="auto" latinLnBrk="0" hangingPunct="1">
-              <a:lnSpc>
-                <a:spcPct val="100000"/>
-              </a:lnSpc>
-              <a:spcBef>
-                <a:spcPts val="0"/>
-              </a:spcBef>
-              <a:spcAft>
-                <a:spcPts val="0"/>
-              </a:spcAft>
-              <a:buClrTx/>
-              <a:buSzTx/>
-              <a:buFontTx/>
-              <a:buNone/>
-              <a:tabLst/>
-              <a:defRPr/>
-            </a:pPr>
-            <a:endParaRPr kumimoji="0" lang="en-US" sz="1800" b="0" i="0" u="none" strike="noStrike" kern="1200" cap="none" spc="0" normalizeH="0" baseline="0" noProof="0" dirty="0">
-              <a:ln>
-                <a:noFill/>
-              </a:ln>
-              <a:solidFill>
-                <a:srgbClr val="C0504D">
-                  <a:lumMod val="75000"/>
-                </a:srgbClr>
-              </a:solidFill>
-              <a:effectLst/>
-              <a:uLnTx/>
-              <a:uFillTx/>
-              <a:latin typeface="Calibri"/>
-              <a:ea typeface="ＭＳ Ｐゴシック" pitchFamily="1" charset="-128"/>
-              <a:cs typeface="+mn-cs"/>
-            </a:endParaRPr>
-          </a:p>
-        </p:txBody>
-      </p:sp>
-      <p:sp>
-        <p:nvSpPr>
           <p:cNvPr id="17409" name="Title 1"/>
           <p:cNvSpPr>
             <a:spLocks noGrp="1"/>
@@ -13719,7 +13570,7 @@
           <a:bodyPr anchor="ctr"/>
           <a:lstStyle/>
           <a:p>
-            <a:pPr eaLnBrk="1" hangingPunct="1" algn="ctr"/>
+            <a:pPr algn="ctr" eaLnBrk="1" hangingPunct="1"/>
             <a:r>
               <a:rPr sz="3600" b="1" i="0">
                 <a:solidFill>
@@ -14024,6 +13875,7 @@
           <a:lstStyle/>
           <a:p>
             <a:pPr algn="ctr"/>
+            <a:endParaRPr/>
           </a:p>
         </p:txBody>
       </p:sp>
@@ -14044,7 +13896,7 @@
           <a:noFill/>
         </p:spPr>
         <p:txBody>
-          <a:bodyPr wrap="square" lIns="36576" rIns="36576" tIns="36576" bIns="36576" anchor="ctr">
+          <a:bodyPr wrap="square" lIns="36576" tIns="36576" rIns="36576" bIns="36576" anchor="ctr">
             <a:spAutoFit/>
           </a:bodyPr>
           <a:lstStyle/>
@@ -14085,7 +13937,7 @@
           <a:noFill/>
         </p:spPr>
         <p:txBody>
-          <a:bodyPr wrap="square" lIns="36576" rIns="36576" tIns="36576" bIns="36576" anchor="t">
+          <a:bodyPr wrap="square" lIns="36576" tIns="36576" rIns="36576" bIns="36576" anchor="t">
             <a:spAutoFit/>
           </a:bodyPr>
           <a:lstStyle/>
@@ -14155,6 +14007,7 @@
           <a:lstStyle/>
           <a:p>
             <a:pPr algn="ctr"/>
+            <a:endParaRPr/>
           </a:p>
         </p:txBody>
       </p:sp>
@@ -14175,7 +14028,7 @@
           <a:noFill/>
         </p:spPr>
         <p:txBody>
-          <a:bodyPr wrap="square" lIns="36576" rIns="36576" tIns="36576" bIns="36576" anchor="ctr">
+          <a:bodyPr wrap="square" lIns="36576" tIns="36576" rIns="36576" bIns="36576" anchor="ctr">
             <a:spAutoFit/>
           </a:bodyPr>
           <a:lstStyle/>
@@ -14216,7 +14069,7 @@
           <a:noFill/>
         </p:spPr>
         <p:txBody>
-          <a:bodyPr wrap="square" lIns="36576" rIns="36576" tIns="36576" bIns="36576" anchor="t">
+          <a:bodyPr wrap="square" lIns="36576" tIns="36576" rIns="36576" bIns="36576" anchor="t">
             <a:spAutoFit/>
           </a:bodyPr>
           <a:lstStyle/>
@@ -14286,6 +14139,7 @@
           <a:lstStyle/>
           <a:p>
             <a:pPr algn="ctr"/>
+            <a:endParaRPr/>
           </a:p>
         </p:txBody>
       </p:sp>
@@ -14306,7 +14160,7 @@
           <a:noFill/>
         </p:spPr>
         <p:txBody>
-          <a:bodyPr wrap="square" lIns="36576" rIns="36576" tIns="36576" bIns="36576" anchor="ctr">
+          <a:bodyPr wrap="square" lIns="36576" tIns="36576" rIns="36576" bIns="36576" anchor="ctr">
             <a:spAutoFit/>
           </a:bodyPr>
           <a:lstStyle/>
@@ -14347,7 +14201,7 @@
           <a:noFill/>
         </p:spPr>
         <p:txBody>
-          <a:bodyPr wrap="square" lIns="36576" rIns="36576" tIns="36576" bIns="36576" anchor="t">
+          <a:bodyPr wrap="square" lIns="36576" tIns="36576" rIns="36576" bIns="36576" anchor="t">
             <a:spAutoFit/>
           </a:bodyPr>
           <a:lstStyle/>
@@ -14417,6 +14271,7 @@
           <a:lstStyle/>
           <a:p>
             <a:pPr algn="ctr"/>
+            <a:endParaRPr/>
           </a:p>
         </p:txBody>
       </p:sp>
@@ -14437,7 +14292,7 @@
           <a:noFill/>
         </p:spPr>
         <p:txBody>
-          <a:bodyPr wrap="square" lIns="36576" rIns="36576" tIns="36576" bIns="36576" anchor="ctr">
+          <a:bodyPr wrap="square" lIns="36576" tIns="36576" rIns="36576" bIns="36576" anchor="ctr">
             <a:spAutoFit/>
           </a:bodyPr>
           <a:lstStyle/>
@@ -14478,7 +14333,7 @@
           <a:noFill/>
         </p:spPr>
         <p:txBody>
-          <a:bodyPr wrap="square" lIns="36576" rIns="36576" tIns="36576" bIns="36576" anchor="t">
+          <a:bodyPr wrap="square" lIns="36576" tIns="36576" rIns="36576" bIns="36576" anchor="t">
             <a:spAutoFit/>
           </a:bodyPr>
           <a:lstStyle/>
@@ -14519,7 +14374,7 @@
           <a:noFill/>
         </p:spPr>
         <p:txBody>
-          <a:bodyPr wrap="square" lIns="0" rIns="0" tIns="0" bIns="0" anchor="ctr">
+          <a:bodyPr wrap="square" lIns="0" tIns="0" rIns="0" bIns="0" anchor="ctr">
             <a:spAutoFit/>
           </a:bodyPr>
           <a:lstStyle/>
@@ -14585,6 +14440,7 @@
           <a:lstStyle/>
           <a:p>
             <a:pPr algn="ctr"/>
+            <a:endParaRPr/>
           </a:p>
         </p:txBody>
       </p:sp>
@@ -14629,7 +14485,7 @@
           <a:noFill/>
         </p:spPr>
         <p:txBody>
-          <a:bodyPr wrap="square" lIns="36576" rIns="36576" tIns="36576" bIns="36576" anchor="ctr">
+          <a:bodyPr wrap="square" lIns="36576" tIns="36576" rIns="36576" bIns="36576" anchor="ctr">
             <a:spAutoFit/>
           </a:bodyPr>
           <a:lstStyle/>
@@ -14712,7 +14568,7 @@
           <a:noFill/>
         </p:spPr>
         <p:txBody>
-          <a:bodyPr wrap="square" lIns="36576" rIns="36576" tIns="36576" bIns="36576" anchor="ctr">
+          <a:bodyPr wrap="square" lIns="36576" tIns="36576" rIns="36576" bIns="36576" anchor="ctr">
             <a:spAutoFit/>
           </a:bodyPr>
           <a:lstStyle/>
@@ -14795,7 +14651,7 @@
           <a:noFill/>
         </p:spPr>
         <p:txBody>
-          <a:bodyPr wrap="square" lIns="36576" rIns="36576" tIns="36576" bIns="36576" anchor="ctr">
+          <a:bodyPr wrap="square" lIns="36576" tIns="36576" rIns="36576" bIns="36576" anchor="ctr">
             <a:spAutoFit/>
           </a:bodyPr>
           <a:lstStyle/>
@@ -14878,7 +14734,7 @@
           <a:noFill/>
         </p:spPr>
         <p:txBody>
-          <a:bodyPr wrap="square" lIns="36576" rIns="36576" tIns="36576" bIns="36576" anchor="ctr">
+          <a:bodyPr wrap="square" lIns="36576" tIns="36576" rIns="36576" bIns="36576" anchor="ctr">
             <a:spAutoFit/>
           </a:bodyPr>
           <a:lstStyle/>
@@ -14961,7 +14817,7 @@
           <a:noFill/>
         </p:spPr>
         <p:txBody>
-          <a:bodyPr wrap="square" lIns="36576" rIns="36576" tIns="36576" bIns="36576" anchor="ctr">
+          <a:bodyPr wrap="square" lIns="36576" tIns="36576" rIns="36576" bIns="36576" anchor="ctr">
             <a:spAutoFit/>
           </a:bodyPr>
           <a:lstStyle/>
@@ -15020,7 +14876,7 @@
           <a:noFill/>
         </p:spPr>
         <p:txBody>
-          <a:bodyPr wrap="square" lIns="0" rIns="0" tIns="0" bIns="0" anchor="ctr">
+          <a:bodyPr wrap="square" lIns="0" tIns="0" rIns="0" bIns="0" anchor="ctr">
             <a:spAutoFit/>
           </a:bodyPr>
           <a:lstStyle/>
@@ -15090,6 +14946,7 @@
           <a:lstStyle/>
           <a:p>
             <a:pPr algn="ctr"/>
+            <a:endParaRPr/>
           </a:p>
         </p:txBody>
       </p:sp>
@@ -15134,7 +14991,7 @@
           <a:noFill/>
         </p:spPr>
         <p:txBody>
-          <a:bodyPr wrap="square" lIns="36576" rIns="36576" tIns="36576" bIns="36576" anchor="ctr">
+          <a:bodyPr wrap="square" lIns="36576" tIns="36576" rIns="36576" bIns="36576" anchor="ctr">
             <a:spAutoFit/>
           </a:bodyPr>
           <a:lstStyle/>
@@ -15175,12 +15032,12 @@
           <a:noFill/>
         </p:spPr>
         <p:txBody>
-          <a:bodyPr wrap="square" lIns="36576" rIns="36576" tIns="36576" bIns="36576" anchor="t">
+          <a:bodyPr wrap="square" lIns="36576" tIns="36576" rIns="36576" bIns="36576" anchor="t">
             <a:spAutoFit/>
           </a:bodyPr>
           <a:lstStyle/>
           <a:p>
-            <a:pPr algn="l" marL="146304" indent="-146304">
+            <a:pPr marL="146304" indent="-146304" algn="l">
               <a:spcAft>
                 <a:spcPts val="300"/>
               </a:spcAft>
@@ -15200,7 +15057,7 @@
             </a:r>
           </a:p>
           <a:p>
-            <a:pPr algn="l" marL="146304" indent="-146304">
+            <a:pPr marL="146304" indent="-146304" algn="l">
               <a:spcAft>
                 <a:spcPts val="300"/>
               </a:spcAft>
@@ -15267,6 +15124,7 @@
           <a:lstStyle/>
           <a:p>
             <a:pPr algn="ctr"/>
+            <a:endParaRPr/>
           </a:p>
         </p:txBody>
       </p:sp>
@@ -15311,7 +15169,7 @@
           <a:noFill/>
         </p:spPr>
         <p:txBody>
-          <a:bodyPr wrap="square" lIns="36576" rIns="36576" tIns="36576" bIns="36576" anchor="ctr">
+          <a:bodyPr wrap="square" lIns="36576" tIns="36576" rIns="36576" bIns="36576" anchor="ctr">
             <a:spAutoFit/>
           </a:bodyPr>
           <a:lstStyle/>
@@ -15352,12 +15210,12 @@
           <a:noFill/>
         </p:spPr>
         <p:txBody>
-          <a:bodyPr wrap="square" lIns="36576" rIns="36576" tIns="36576" bIns="36576" anchor="t">
+          <a:bodyPr wrap="square" lIns="36576" tIns="36576" rIns="36576" bIns="36576" anchor="t">
             <a:spAutoFit/>
           </a:bodyPr>
           <a:lstStyle/>
           <a:p>
-            <a:pPr algn="l" marL="146304" indent="-146304">
+            <a:pPr marL="146304" indent="-146304" algn="l">
               <a:spcAft>
                 <a:spcPts val="300"/>
               </a:spcAft>
@@ -15377,7 +15235,7 @@
             </a:r>
           </a:p>
           <a:p>
-            <a:pPr algn="l" marL="146304" indent="-146304">
+            <a:pPr marL="146304" indent="-146304" algn="l">
               <a:spcAft>
                 <a:spcPts val="300"/>
               </a:spcAft>
@@ -15444,6 +15302,7 @@
           <a:lstStyle/>
           <a:p>
             <a:pPr algn="ctr"/>
+            <a:endParaRPr/>
           </a:p>
         </p:txBody>
       </p:sp>
@@ -15488,7 +15347,7 @@
           <a:noFill/>
         </p:spPr>
         <p:txBody>
-          <a:bodyPr wrap="square" lIns="36576" rIns="36576" tIns="36576" bIns="36576" anchor="ctr">
+          <a:bodyPr wrap="square" lIns="36576" tIns="36576" rIns="36576" bIns="36576" anchor="ctr">
             <a:spAutoFit/>
           </a:bodyPr>
           <a:lstStyle/>
@@ -15529,12 +15388,12 @@
           <a:noFill/>
         </p:spPr>
         <p:txBody>
-          <a:bodyPr wrap="square" lIns="36576" rIns="36576" tIns="36576" bIns="36576" anchor="t">
+          <a:bodyPr wrap="square" lIns="36576" tIns="36576" rIns="36576" bIns="36576" anchor="t">
             <a:spAutoFit/>
           </a:bodyPr>
           <a:lstStyle/>
           <a:p>
-            <a:pPr algn="l" marL="146304" indent="-146304">
+            <a:pPr marL="146304" indent="-146304" algn="l">
               <a:spcAft>
                 <a:spcPts val="300"/>
               </a:spcAft>
@@ -15554,7 +15413,7 @@
             </a:r>
           </a:p>
           <a:p>
-            <a:pPr algn="l" marL="146304" indent="-146304">
+            <a:pPr marL="146304" indent="-146304" algn="l">
               <a:spcAft>
                 <a:spcPts val="300"/>
               </a:spcAft>
@@ -15621,6 +15480,7 @@
           <a:lstStyle/>
           <a:p>
             <a:pPr algn="ctr"/>
+            <a:endParaRPr/>
           </a:p>
         </p:txBody>
       </p:sp>
@@ -15665,7 +15525,7 @@
           <a:noFill/>
         </p:spPr>
         <p:txBody>
-          <a:bodyPr wrap="square" lIns="36576" rIns="36576" tIns="36576" bIns="36576" anchor="ctr">
+          <a:bodyPr wrap="square" lIns="36576" tIns="36576" rIns="36576" bIns="36576" anchor="ctr">
             <a:spAutoFit/>
           </a:bodyPr>
           <a:lstStyle/>
@@ -15706,12 +15566,12 @@
           <a:noFill/>
         </p:spPr>
         <p:txBody>
-          <a:bodyPr wrap="square" lIns="36576" rIns="36576" tIns="36576" bIns="36576" anchor="t">
+          <a:bodyPr wrap="square" lIns="36576" tIns="36576" rIns="36576" bIns="36576" anchor="t">
             <a:spAutoFit/>
           </a:bodyPr>
           <a:lstStyle/>
           <a:p>
-            <a:pPr algn="l" marL="146304" indent="-146304">
+            <a:pPr marL="146304" indent="-146304" algn="l">
               <a:spcAft>
                 <a:spcPts val="300"/>
               </a:spcAft>
@@ -15731,7 +15591,7 @@
             </a:r>
           </a:p>
           <a:p>
-            <a:pPr algn="l" marL="146304" indent="-146304">
+            <a:pPr marL="146304" indent="-146304" algn="l">
               <a:spcAft>
                 <a:spcPts val="300"/>
               </a:spcAft>
@@ -15784,85 +15644,6 @@
       </p:grpSpPr>
       <p:sp>
         <p:nvSpPr>
-          <p:cNvPr id="10" name="Rectangle 9">
-            <a:extLst>
-              <a:ext uri="{FF2B5EF4-FFF2-40B4-BE49-F238E27FC236}">
-                <a16:creationId xmlns:a16="http://schemas.microsoft.com/office/drawing/2014/main" id="{AD4F69D3-EEB0-4C4C-9434-B9960FB5854C}"/>
-              </a:ext>
-            </a:extLst>
-          </p:cNvPr>
-          <p:cNvSpPr>
-            <a:spLocks noChangeArrowheads="1"/>
-          </p:cNvSpPr>
-          <p:nvPr/>
-        </p:nvSpPr>
-        <p:spPr bwMode="auto">
-          <a:xfrm>
-            <a:off x="0" y="6354762"/>
-            <a:ext cx="12191999" cy="503238"/>
-          </a:xfrm>
-          <a:prstGeom prst="rect">
-            <a:avLst/>
-          </a:prstGeom>
-          <a:solidFill>
-            <a:srgbClr val="0070C0"/>
-          </a:solidFill>
-          <a:ln w="9525">
-            <a:noFill/>
-            <a:miter lim="800000"/>
-            <a:headEnd/>
-            <a:tailEnd/>
-          </a:ln>
-          <a:effectLst>
-            <a:outerShdw dist="23000" dir="5400000" rotWithShape="0">
-              <a:srgbClr val="808080">
-                <a:alpha val="34999"/>
-              </a:srgbClr>
-            </a:outerShdw>
-          </a:effectLst>
-        </p:spPr>
-        <p:txBody>
-          <a:bodyPr anchor="ctr"/>
-          <a:lstStyle/>
-          <a:p>
-            <a:pPr marL="0" marR="0" lvl="0" indent="0" algn="ctr" defTabSz="457200" rtl="0" eaLnBrk="1" fontAlgn="auto" latinLnBrk="0" hangingPunct="1">
-              <a:lnSpc>
-                <a:spcPct val="100000"/>
-              </a:lnSpc>
-              <a:spcBef>
-                <a:spcPts val="0"/>
-              </a:spcBef>
-              <a:spcAft>
-                <a:spcPts val="0"/>
-              </a:spcAft>
-              <a:buClrTx/>
-              <a:buSzTx/>
-              <a:buFontTx/>
-              <a:buNone/>
-              <a:tabLst/>
-              <a:defRPr/>
-            </a:pPr>
-            <a:endParaRPr kumimoji="0" lang="en-US" sz="1800" b="0" i="0" u="none" strike="noStrike" kern="1200" cap="none" spc="0" normalizeH="0" baseline="0" noProof="0" dirty="0">
-              <a:ln>
-                <a:noFill/>
-              </a:ln>
-              <a:solidFill>
-                <a:srgbClr val="C0504D">
-                  <a:lumMod val="75000"/>
-                </a:srgbClr>
-              </a:solidFill>
-              <a:effectLst/>
-              <a:uLnTx/>
-              <a:uFillTx/>
-              <a:latin typeface="Calibri"/>
-              <a:ea typeface="ＭＳ Ｐゴシック" pitchFamily="1" charset="-128"/>
-              <a:cs typeface="+mn-cs"/>
-            </a:endParaRPr>
-          </a:p>
-        </p:txBody>
-      </p:sp>
-      <p:sp>
-        <p:nvSpPr>
           <p:cNvPr id="17409" name="Title 1"/>
           <p:cNvSpPr>
             <a:spLocks noGrp="1"/>
@@ -15881,7 +15662,7 @@
           <a:bodyPr anchor="ctr"/>
           <a:lstStyle/>
           <a:p>
-            <a:pPr eaLnBrk="1" hangingPunct="1" algn="ctr"/>
+            <a:pPr algn="ctr" eaLnBrk="1" hangingPunct="1"/>
             <a:r>
               <a:rPr sz="3600" b="1" i="0">
                 <a:solidFill>
@@ -16017,7 +15798,7 @@
               <a:defRPr/>
             </a:pPr>
             <a:r>
-              <a:rPr kumimoji="0" lang="en-US" sz="1200" b="0" i="0" u="none" strike="noStrike" kern="1200" cap="none" spc="0" normalizeH="0" baseline="0" noProof="0">
+              <a:rPr kumimoji="0" lang="en-US" sz="1200" b="0" i="0" u="none" strike="noStrike" kern="1200" cap="none" spc="0" normalizeH="0" baseline="0" noProof="0" dirty="0">
                 <a:ln>
                   <a:noFill/>
                 </a:ln>
@@ -16033,20 +15814,6 @@
               </a:rPr>
               <a:t>@SIH Idea submission- Template</a:t>
             </a:r>
-            <a:endParaRPr kumimoji="0" lang="en-US" sz="1200" b="0" i="0" u="none" strike="noStrike" kern="1200" cap="none" spc="0" normalizeH="0" baseline="0" noProof="0" dirty="0">
-              <a:ln>
-                <a:noFill/>
-              </a:ln>
-              <a:solidFill>
-                <a:prstClr val="white"/>
-              </a:solidFill>
-              <a:effectLst/>
-              <a:uLnTx/>
-              <a:uFillTx/>
-              <a:latin typeface="TradeGothic"/>
-              <a:ea typeface="+mn-ea"/>
-              <a:cs typeface="+mn-cs"/>
-            </a:endParaRPr>
           </a:p>
         </p:txBody>
       </p:sp>
@@ -16157,7 +15924,7 @@
           <a:noFill/>
         </p:spPr>
         <p:txBody>
-          <a:bodyPr wrap="square" lIns="0" rIns="0" tIns="0" bIns="0" anchor="ctr">
+          <a:bodyPr wrap="square" lIns="0" tIns="0" rIns="0" bIns="0" anchor="ctr">
             <a:spAutoFit/>
           </a:bodyPr>
           <a:lstStyle/>
@@ -16225,6 +15992,7 @@
           <a:lstStyle/>
           <a:p>
             <a:pPr algn="ctr"/>
+            <a:endParaRPr/>
           </a:p>
         </p:txBody>
       </p:sp>
@@ -16245,7 +16013,7 @@
           <a:noFill/>
         </p:spPr>
         <p:txBody>
-          <a:bodyPr wrap="square" lIns="36576" rIns="36576" tIns="36576" bIns="36576" anchor="ctr">
+          <a:bodyPr wrap="square" lIns="36576" tIns="36576" rIns="36576" bIns="36576" anchor="ctr">
             <a:spAutoFit/>
           </a:bodyPr>
           <a:lstStyle/>
@@ -16331,6 +16099,7 @@
           <a:lstStyle/>
           <a:p>
             <a:pPr algn="ctr"/>
+            <a:endParaRPr/>
           </a:p>
         </p:txBody>
       </p:sp>
@@ -16351,7 +16120,7 @@
           <a:noFill/>
         </p:spPr>
         <p:txBody>
-          <a:bodyPr wrap="square" lIns="36576" rIns="36576" tIns="36576" bIns="36576" anchor="ctr">
+          <a:bodyPr wrap="square" lIns="36576" tIns="36576" rIns="36576" bIns="36576" anchor="ctr">
             <a:spAutoFit/>
           </a:bodyPr>
           <a:lstStyle/>
@@ -16437,6 +16206,7 @@
           <a:lstStyle/>
           <a:p>
             <a:pPr algn="ctr"/>
+            <a:endParaRPr/>
           </a:p>
         </p:txBody>
       </p:sp>
@@ -16457,7 +16227,7 @@
           <a:noFill/>
         </p:spPr>
         <p:txBody>
-          <a:bodyPr wrap="square" lIns="36576" rIns="36576" tIns="36576" bIns="36576" anchor="ctr">
+          <a:bodyPr wrap="square" lIns="36576" tIns="36576" rIns="36576" bIns="36576" anchor="ctr">
             <a:spAutoFit/>
           </a:bodyPr>
           <a:lstStyle/>
@@ -16543,6 +16313,7 @@
           <a:lstStyle/>
           <a:p>
             <a:pPr algn="ctr"/>
+            <a:endParaRPr/>
           </a:p>
         </p:txBody>
       </p:sp>
@@ -16563,7 +16334,7 @@
           <a:noFill/>
         </p:spPr>
         <p:txBody>
-          <a:bodyPr wrap="square" lIns="36576" rIns="36576" tIns="36576" bIns="36576" anchor="ctr">
+          <a:bodyPr wrap="square" lIns="36576" tIns="36576" rIns="36576" bIns="36576" anchor="ctr">
             <a:spAutoFit/>
           </a:bodyPr>
           <a:lstStyle/>
@@ -16646,7 +16417,7 @@
           <a:noFill/>
         </p:spPr>
         <p:txBody>
-          <a:bodyPr wrap="square" lIns="0" rIns="0" tIns="0" bIns="0" anchor="ctr">
+          <a:bodyPr wrap="square" lIns="0" tIns="0" rIns="0" bIns="0" anchor="ctr">
             <a:spAutoFit/>
           </a:bodyPr>
           <a:lstStyle/>
@@ -16712,6 +16483,7 @@
           <a:lstStyle/>
           <a:p>
             <a:pPr algn="ctr"/>
+            <a:endParaRPr/>
           </a:p>
         </p:txBody>
       </p:sp>
@@ -16732,7 +16504,7 @@
           <a:noFill/>
         </p:spPr>
         <p:txBody>
-          <a:bodyPr wrap="square" lIns="36576" rIns="36576" tIns="36576" bIns="36576" anchor="ctr">
+          <a:bodyPr wrap="square" lIns="36576" tIns="36576" rIns="36576" bIns="36576" anchor="ctr">
             <a:spAutoFit/>
           </a:bodyPr>
           <a:lstStyle/>
@@ -16987,7 +16759,7 @@
           <a:noFill/>
         </p:spPr>
         <p:txBody>
-          <a:bodyPr wrap="square" lIns="0" rIns="0" tIns="0" bIns="0" anchor="ctr">
+          <a:bodyPr wrap="square" lIns="0" tIns="0" rIns="0" bIns="0" anchor="ctr">
             <a:spAutoFit/>
           </a:bodyPr>
           <a:lstStyle/>
@@ -17077,6 +16849,7 @@
           <a:lstStyle/>
           <a:p>
             <a:pPr algn="ctr"/>
+            <a:endParaRPr/>
           </a:p>
         </p:txBody>
       </p:sp>
@@ -17121,7 +16894,7 @@
           <a:noFill/>
         </p:spPr>
         <p:txBody>
-          <a:bodyPr wrap="square" lIns="0" rIns="0" tIns="0" bIns="0" anchor="ctr">
+          <a:bodyPr wrap="square" lIns="0" tIns="0" rIns="0" bIns="0" anchor="ctr">
             <a:spAutoFit/>
           </a:bodyPr>
           <a:lstStyle/>
@@ -17187,6 +16960,7 @@
           <a:lstStyle/>
           <a:p>
             <a:pPr algn="ctr"/>
+            <a:endParaRPr/>
           </a:p>
         </p:txBody>
       </p:sp>
@@ -17198,8 +16972,8 @@
         </p:nvSpPr>
         <p:spPr>
           <a:xfrm>
-            <a:off x="7360920" y="5029200"/>
-            <a:ext cx="4526280" cy="1143000"/>
+            <a:off x="7360920" y="5154680"/>
+            <a:ext cx="4526280" cy="892039"/>
           </a:xfrm>
           <a:prstGeom prst="rect">
             <a:avLst/>
@@ -17207,7 +16981,7 @@
           <a:noFill/>
         </p:spPr>
         <p:txBody>
-          <a:bodyPr wrap="square" lIns="36576" rIns="36576" tIns="36576" bIns="36576" anchor="ctr">
+          <a:bodyPr wrap="square" lIns="36576" tIns="36576" rIns="36576" bIns="36576" anchor="ctr">
             <a:spAutoFit/>
           </a:bodyPr>
           <a:lstStyle/>
@@ -17218,14 +16992,12 @@
               </a:spcAft>
             </a:pPr>
             <a:r>
-              <a:rPr sz="1200" b="1" i="0" u="sng">
+              <a:rPr sz="1200" b="1" i="0" u="sng" dirty="0">
                 <a:solidFill>
                   <a:srgbClr val="1565C0"/>
                 </a:solidFill>
                 <a:latin typeface="Calibri"/>
                 <a:hlinkClick r:id="rId8"/>
-                <a:ea typeface="Calibri"/>
-                <a:cs typeface="Calibri"/>
               </a:rPr>
               <a:t>1) Source Code Repository</a:t>
             </a:r>
@@ -17237,14 +17009,12 @@
               </a:spcAft>
             </a:pPr>
             <a:r>
-              <a:rPr sz="800" b="0" i="0">
+              <a:rPr sz="800" b="0" i="0" dirty="0">
                 <a:solidFill>
                   <a:srgbClr val="555555"/>
                 </a:solidFill>
                 <a:latin typeface="Calibri"/>
                 <a:hlinkClick r:id="rId8"/>
-                <a:ea typeface="Calibri"/>
-                <a:cs typeface="Calibri"/>
               </a:rPr>
               <a:t>github.com/FX-at-Dev/Adaptive-Lane-Free-Path-Planning---Collision-Avoidance-for-Indian-Roads</a:t>
             </a:r>
@@ -17256,7 +17026,7 @@
               </a:spcAft>
             </a:pPr>
             <a:r>
-              <a:rPr sz="1200" b="1" i="0" u="sng">
+              <a:rPr sz="1200" b="1" i="0" u="sng" dirty="0">
                 <a:solidFill>
                   <a:srgbClr val="1565C0"/>
                 </a:solidFill>
@@ -17264,8 +17034,28 @@
                 <a:ea typeface="Calibri"/>
                 <a:cs typeface="Calibri"/>
               </a:rPr>
-              <a:t>2) Demo Video: All 5 Scenarios</a:t>
-            </a:r>
+              <a:t>2) </a:t>
+            </a:r>
+            <a:r>
+              <a:rPr sz="1200" b="1" i="0" u="sng" dirty="0">
+                <a:solidFill>
+                  <a:srgbClr val="1565C0"/>
+                </a:solidFill>
+                <a:latin typeface="Calibri"/>
+                <a:ea typeface="Calibri"/>
+                <a:cs typeface="Calibri"/>
+                <a:hlinkClick r:id="rId9"/>
+              </a:rPr>
+              <a:t>Demo Video: All 5 Scenarios</a:t>
+            </a:r>
+            <a:endParaRPr sz="1200" b="1" i="0" u="sng" dirty="0">
+              <a:solidFill>
+                <a:srgbClr val="1565C0"/>
+              </a:solidFill>
+              <a:latin typeface="Calibri"/>
+              <a:ea typeface="Calibri"/>
+              <a:cs typeface="Calibri"/>
+            </a:endParaRPr>
           </a:p>
           <a:p>
             <a:pPr algn="l">
@@ -17274,7 +17064,7 @@
               </a:spcAft>
             </a:pPr>
             <a:r>
-              <a:rPr sz="1200" b="1" i="0" u="sng">
+              <a:rPr sz="1200" b="1" i="0" u="sng" dirty="0">
                 <a:solidFill>
                   <a:srgbClr val="1565C0"/>
                 </a:solidFill>
